--- a/Presentations/Cryto Arbitrage P2.pptx
+++ b/Presentations/Cryto Arbitrage P2.pptx
@@ -9,20 +9,23 @@
     <p:sldId id="257" r:id="rId3"/>
     <p:sldId id="258" r:id="rId4"/>
     <p:sldId id="285" r:id="rId5"/>
-    <p:sldId id="264" r:id="rId6"/>
-    <p:sldId id="276" r:id="rId7"/>
-    <p:sldId id="278" r:id="rId8"/>
-    <p:sldId id="259" r:id="rId9"/>
-    <p:sldId id="277" r:id="rId10"/>
-    <p:sldId id="280" r:id="rId11"/>
-    <p:sldId id="279" r:id="rId12"/>
-    <p:sldId id="281" r:id="rId13"/>
-    <p:sldId id="282" r:id="rId14"/>
-    <p:sldId id="283" r:id="rId15"/>
-    <p:sldId id="262" r:id="rId16"/>
-    <p:sldId id="263" r:id="rId17"/>
-    <p:sldId id="284" r:id="rId18"/>
-    <p:sldId id="275" r:id="rId19"/>
+    <p:sldId id="287" r:id="rId6"/>
+    <p:sldId id="264" r:id="rId7"/>
+    <p:sldId id="276" r:id="rId8"/>
+    <p:sldId id="278" r:id="rId9"/>
+    <p:sldId id="259" r:id="rId10"/>
+    <p:sldId id="286" r:id="rId11"/>
+    <p:sldId id="277" r:id="rId12"/>
+    <p:sldId id="280" r:id="rId13"/>
+    <p:sldId id="279" r:id="rId14"/>
+    <p:sldId id="281" r:id="rId15"/>
+    <p:sldId id="288" r:id="rId16"/>
+    <p:sldId id="282" r:id="rId17"/>
+    <p:sldId id="283" r:id="rId18"/>
+    <p:sldId id="262" r:id="rId19"/>
+    <p:sldId id="263" r:id="rId20"/>
+    <p:sldId id="284" r:id="rId21"/>
+    <p:sldId id="275" r:id="rId22"/>
   </p:sldIdLst>
   <p:sldSz cx="12192000" cy="6858000"/>
   <p:notesSz cx="7559675" cy="10691813"/>
@@ -134,6 +137,7 @@
         </p14:section>
         <p14:section name="Segment 1: Data Collection" id="{EF0B3281-B1BF-494F-9192-C84F6BA2025E}">
           <p14:sldIdLst>
+            <p14:sldId id="287"/>
             <p14:sldId id="264"/>
             <p14:sldId id="276"/>
             <p14:sldId id="278"/>
@@ -142,6 +146,7 @@
         <p14:section name="Segment 2: Feature Enginereeing" id="{4A00F8CE-F3A3-CF43-836A-4AC8F28433CA}">
           <p14:sldIdLst>
             <p14:sldId id="259"/>
+            <p14:sldId id="286"/>
             <p14:sldId id="277"/>
             <p14:sldId id="280"/>
             <p14:sldId id="279"/>
@@ -150,6 +155,7 @@
         </p14:section>
         <p14:section name="Segment 3: ML Model" id="{A16F512B-AF61-5C44-852A-F11220178FFD}">
           <p14:sldIdLst>
+            <p14:sldId id="288"/>
             <p14:sldId id="282"/>
             <p14:sldId id="283"/>
           </p14:sldIdLst>
@@ -6867,7 +6873,7 @@
           <a:pPr rtl="0"/>
           <a:r>
             <a:rPr lang="en-US" dirty="0"/>
-            <a:t>Predict when spreads will exceed threshold</a:t>
+            <a:t>Time-to-Opportunity forecasting</a:t>
           </a:r>
         </a:p>
       </dgm:t>
@@ -6941,7 +6947,7 @@
           <a:pPr rtl="0"/>
           <a:r>
             <a:rPr lang="en-US" dirty="0"/>
-            <a:t>How long opportunity last?</a:t>
+            <a:t>How long opportunity lasts?</a:t>
           </a:r>
         </a:p>
       </dgm:t>
@@ -6978,7 +6984,7 @@
           <a:pPr rtl="0"/>
           <a:r>
             <a:rPr lang="en-US" dirty="0"/>
-            <a:t>Execution window optimization</a:t>
+            <a:t>Execution window optimization (choose between tactics)</a:t>
           </a:r>
         </a:p>
       </dgm:t>
@@ -7153,43 +7159,6 @@
         </a:p>
       </dgm:t>
     </dgm:pt>
-    <dgm:pt modelId="{ABBE7597-53B9-4C41-AC6B-0A10A93398F4}">
-      <dgm:prSet phldrT="[Text]"/>
-      <dgm:spPr/>
-      <dgm:t>
-        <a:bodyPr/>
-        <a:lstStyle/>
-        <a:p>
-          <a:pPr rtl="0"/>
-          <a:r>
-            <a:rPr lang="en-US" dirty="0"/>
-            <a:t>Time-to-Opportunity forecasting</a:t>
-          </a:r>
-        </a:p>
-      </dgm:t>
-    </dgm:pt>
-    <dgm:pt modelId="{1A48222D-F420-4C42-9A6F-131676C03FBE}" type="parTrans" cxnId="{D7FBAD55-5979-D24C-A213-9DE0D3F57956}">
-      <dgm:prSet/>
-      <dgm:spPr/>
-      <dgm:t>
-        <a:bodyPr/>
-        <a:lstStyle/>
-        <a:p>
-          <a:endParaRPr lang="en-US"/>
-        </a:p>
-      </dgm:t>
-    </dgm:pt>
-    <dgm:pt modelId="{11D26E14-A879-3A46-B66B-9F1D85E83DE0}" type="sibTrans" cxnId="{D7FBAD55-5979-D24C-A213-9DE0D3F57956}">
-      <dgm:prSet/>
-      <dgm:spPr/>
-      <dgm:t>
-        <a:bodyPr/>
-        <a:lstStyle/>
-        <a:p>
-          <a:endParaRPr lang="en-US"/>
-        </a:p>
-      </dgm:t>
-    </dgm:pt>
     <dgm:pt modelId="{1D5D2B9F-01A7-D542-9391-606C7AD3B312}">
       <dgm:prSet phldrT="[Text]"/>
       <dgm:spPr/>
@@ -7315,16 +7284,14 @@
   <dgm:cxnLst>
     <dgm:cxn modelId="{281F2A04-B0AF-E64C-9DF9-9C3AF8734A19}" srcId="{EEFB7D2B-3312-9745-AC8C-A46443B3687A}" destId="{49AE2077-F020-8A47-B565-789E32465EA0}" srcOrd="1" destOrd="0" parTransId="{E2DAF38B-3C44-3D49-BDBD-DF2DF833149B}" sibTransId="{638475C0-079E-004E-8448-6786AB542F5C}"/>
     <dgm:cxn modelId="{0B38E72F-61E4-6448-807C-7DC263DD0DC0}" srcId="{13A8A0C1-B43E-9947-BD92-4F38B935F0A1}" destId="{76E00432-0268-314F-8C97-4358F4AD9151}" srcOrd="0" destOrd="0" parTransId="{395C1AA8-00EC-4740-BD1B-7AE800D93EC7}" sibTransId="{644B8AC8-6198-FF4B-BD69-30E54A36A1D9}"/>
-    <dgm:cxn modelId="{F54F9F3E-AF46-B547-8608-7E39E8068AA6}" srcId="{76E00432-0268-314F-8C97-4358F4AD9151}" destId="{1D5D2B9F-01A7-D542-9391-606C7AD3B312}" srcOrd="2" destOrd="0" parTransId="{DBAACDCB-B971-9F48-AC1A-0EBE006106C2}" sibTransId="{14BD824E-ACD1-3D48-BF11-8B578282447E}"/>
+    <dgm:cxn modelId="{F54F9F3E-AF46-B547-8608-7E39E8068AA6}" srcId="{76E00432-0268-314F-8C97-4358F4AD9151}" destId="{1D5D2B9F-01A7-D542-9391-606C7AD3B312}" srcOrd="1" destOrd="0" parTransId="{DBAACDCB-B971-9F48-AC1A-0EBE006106C2}" sibTransId="{14BD824E-ACD1-3D48-BF11-8B578282447E}"/>
     <dgm:cxn modelId="{55474E49-7BC8-C741-BDA0-481D8DA3A75B}" srcId="{13A8A0C1-B43E-9947-BD92-4F38B935F0A1}" destId="{EEFB7D2B-3312-9745-AC8C-A46443B3687A}" srcOrd="2" destOrd="0" parTransId="{DB3E0B93-6A1A-6E41-AF67-94597B4D9617}" sibTransId="{316C9FC6-5E71-A54A-859E-E8BD5C0CEEAC}"/>
     <dgm:cxn modelId="{EE6D974F-0C3C-F94C-B89C-95CE1CB63CBB}" type="presOf" srcId="{EB51F753-E4A0-1640-AD0C-B62833BD5C03}" destId="{56988011-5148-E247-BA6F-9605331566C0}" srcOrd="0" destOrd="0" presId="urn:microsoft.com/office/officeart/2005/8/layout/hList1"/>
     <dgm:cxn modelId="{D74E8453-E041-CE4E-9EEB-8DFE2FC125A2}" srcId="{76E00432-0268-314F-8C97-4358F4AD9151}" destId="{078A686C-3966-9B4D-B531-9F456F5ED52B}" srcOrd="0" destOrd="0" parTransId="{A050F16B-C65A-A74F-8BD0-AC4BF121A835}" sibTransId="{8AE737C3-EC3E-F044-A921-97658115215E}"/>
-    <dgm:cxn modelId="{D7FBAD55-5979-D24C-A213-9DE0D3F57956}" srcId="{76E00432-0268-314F-8C97-4358F4AD9151}" destId="{ABBE7597-53B9-4C41-AC6B-0A10A93398F4}" srcOrd="1" destOrd="0" parTransId="{1A48222D-F420-4C42-9A6F-131676C03FBE}" sibTransId="{11D26E14-A879-3A46-B66B-9F1D85E83DE0}"/>
     <dgm:cxn modelId="{8B394C57-5E9B-A947-A5DF-0865535736CB}" type="presOf" srcId="{078A686C-3966-9B4D-B531-9F456F5ED52B}" destId="{1C498423-64E6-FD4E-AA73-2B573B30F0F6}" srcOrd="0" destOrd="0" presId="urn:microsoft.com/office/officeart/2005/8/layout/hList1"/>
     <dgm:cxn modelId="{B2C29D63-6139-F245-B51F-F06E0D86E274}" srcId="{9480D2F4-41A9-6042-BB45-5BF649528163}" destId="{BCE360B3-3EC9-8D46-8FCC-A7F09A82EF36}" srcOrd="1" destOrd="0" parTransId="{FD0BDF0B-277F-274B-B53F-FAD92855312C}" sibTransId="{7C678E42-C6F7-A14F-AAC7-97F1B9CA46AC}"/>
     <dgm:cxn modelId="{70F4516B-6CEB-DD45-9FDF-884777CF63D1}" type="presOf" srcId="{13A8A0C1-B43E-9947-BD92-4F38B935F0A1}" destId="{36FEA553-F9FD-7E47-B0A3-897650516B0E}" srcOrd="0" destOrd="0" presId="urn:microsoft.com/office/officeart/2005/8/layout/hList1"/>
     <dgm:cxn modelId="{178B7B70-9F95-FF49-97E7-8B3D497D5948}" type="presOf" srcId="{1FB32EEA-FFD6-E64F-8076-A1DE79830F0C}" destId="{EAB164AC-F755-6D46-B650-DA5DC41E47B9}" srcOrd="0" destOrd="0" presId="urn:microsoft.com/office/officeart/2005/8/layout/hList1"/>
-    <dgm:cxn modelId="{C36B5F87-8EAC-FA40-9E15-1D2838727AF0}" type="presOf" srcId="{ABBE7597-53B9-4C41-AC6B-0A10A93398F4}" destId="{1C498423-64E6-FD4E-AA73-2B573B30F0F6}" srcOrd="0" destOrd="1" presId="urn:microsoft.com/office/officeart/2005/8/layout/hList1"/>
     <dgm:cxn modelId="{55B1579A-45DE-1D49-8EBF-68FF749783D0}" type="presOf" srcId="{BCE360B3-3EC9-8D46-8FCC-A7F09A82EF36}" destId="{EAB164AC-F755-6D46-B650-DA5DC41E47B9}" srcOrd="0" destOrd="1" presId="urn:microsoft.com/office/officeart/2005/8/layout/hList1"/>
     <dgm:cxn modelId="{CA301C9F-96E7-E94A-94BF-B81763CD1071}" type="presOf" srcId="{EEFB7D2B-3312-9745-AC8C-A46443B3687A}" destId="{13271ECE-3FAB-C742-9035-570626AD0680}" srcOrd="0" destOrd="0" presId="urn:microsoft.com/office/officeart/2005/8/layout/hList1"/>
     <dgm:cxn modelId="{7C103FA3-91A9-4048-A53F-EEDC12996C22}" type="presOf" srcId="{76E00432-0268-314F-8C97-4358F4AD9151}" destId="{D978E860-9C66-054D-8648-F298179AFC92}" srcOrd="0" destOrd="0" presId="urn:microsoft.com/office/officeart/2005/8/layout/hList1"/>
@@ -7335,7 +7302,7 @@
     <dgm:cxn modelId="{5E01CCD9-0476-3149-81CB-D3ED6C66C838}" srcId="{9480D2F4-41A9-6042-BB45-5BF649528163}" destId="{1FB32EEA-FFD6-E64F-8076-A1DE79830F0C}" srcOrd="0" destOrd="0" parTransId="{8BBE8E62-BBA6-2A45-9606-B187266FC5DC}" sibTransId="{2F871216-DFAE-1747-957E-1A6DCFDBFDB1}"/>
     <dgm:cxn modelId="{14D337DE-405F-5A40-B9FB-7DA7624B92EA}" type="presOf" srcId="{49AE2077-F020-8A47-B565-789E32465EA0}" destId="{56988011-5148-E247-BA6F-9605331566C0}" srcOrd="0" destOrd="1" presId="urn:microsoft.com/office/officeart/2005/8/layout/hList1"/>
     <dgm:cxn modelId="{8F1733EA-FD81-E241-AA0C-85EF1483E11F}" type="presOf" srcId="{83BB5E66-021A-DB41-81BB-2FE29523648C}" destId="{56988011-5148-E247-BA6F-9605331566C0}" srcOrd="0" destOrd="2" presId="urn:microsoft.com/office/officeart/2005/8/layout/hList1"/>
-    <dgm:cxn modelId="{793B31FB-5196-D544-A3C3-5126271776B4}" type="presOf" srcId="{1D5D2B9F-01A7-D542-9391-606C7AD3B312}" destId="{1C498423-64E6-FD4E-AA73-2B573B30F0F6}" srcOrd="0" destOrd="2" presId="urn:microsoft.com/office/officeart/2005/8/layout/hList1"/>
+    <dgm:cxn modelId="{793B31FB-5196-D544-A3C3-5126271776B4}" type="presOf" srcId="{1D5D2B9F-01A7-D542-9391-606C7AD3B312}" destId="{1C498423-64E6-FD4E-AA73-2B573B30F0F6}" srcOrd="0" destOrd="1" presId="urn:microsoft.com/office/officeart/2005/8/layout/hList1"/>
     <dgm:cxn modelId="{31DDE575-1AFC-8646-9381-6FA83FE7F727}" type="presParOf" srcId="{36FEA553-F9FD-7E47-B0A3-897650516B0E}" destId="{9B27D59A-1FD3-674D-8DF8-B1E42D4800E5}" srcOrd="0" destOrd="0" presId="urn:microsoft.com/office/officeart/2005/8/layout/hList1"/>
     <dgm:cxn modelId="{00DD6455-C11A-2B43-BC5F-3AB6CF613CFB}" type="presParOf" srcId="{9B27D59A-1FD3-674D-8DF8-B1E42D4800E5}" destId="{D978E860-9C66-054D-8648-F298179AFC92}" srcOrd="0" destOrd="0" presId="urn:microsoft.com/office/officeart/2005/8/layout/hList1"/>
     <dgm:cxn modelId="{76E003A0-FB70-554B-9269-FEA55081B48B}" type="presParOf" srcId="{9B27D59A-1FD3-674D-8DF8-B1E42D4800E5}" destId="{1C498423-64E6-FD4E-AA73-2B573B30F0F6}" srcOrd="1" destOrd="0" presId="urn:microsoft.com/office/officeart/2005/8/layout/hList1"/>
@@ -10668,8 +10635,8 @@
       </dsp:nvSpPr>
       <dsp:spPr>
         <a:xfrm>
-          <a:off x="3181" y="54560"/>
-          <a:ext cx="3101634" cy="785363"/>
+          <a:off x="3181" y="23402"/>
+          <a:ext cx="3101634" cy="825033"/>
         </a:xfrm>
         <a:prstGeom prst="rect">
           <a:avLst/>
@@ -10703,12 +10670,12 @@
         </a:fontRef>
       </dsp:style>
       <dsp:txBody>
-        <a:bodyPr spcFirstLastPara="0" vert="horz" wrap="square" lIns="156464" tIns="89408" rIns="156464" bIns="89408" numCol="1" spcCol="1270" anchor="ctr" anchorCtr="0">
+        <a:bodyPr spcFirstLastPara="0" vert="horz" wrap="square" lIns="163576" tIns="93472" rIns="163576" bIns="93472" numCol="1" spcCol="1270" anchor="ctr" anchorCtr="0">
           <a:noAutofit/>
         </a:bodyPr>
         <a:lstStyle/>
         <a:p>
-          <a:pPr marL="0" lvl="0" indent="0" algn="ctr" defTabSz="977900" rtl="0">
+          <a:pPr marL="0" lvl="0" indent="0" algn="ctr" defTabSz="1022350" rtl="0">
             <a:lnSpc>
               <a:spcPct val="90000"/>
             </a:lnSpc>
@@ -10721,14 +10688,14 @@
             <a:buNone/>
           </a:pPr>
           <a:r>
-            <a:rPr lang="en-US" sz="2200" kern="1200" dirty="0"/>
+            <a:rPr lang="en-US" sz="2300" kern="1200" dirty="0"/>
             <a:t>Opportunity Prediction</a:t>
           </a:r>
         </a:p>
       </dsp:txBody>
       <dsp:txXfrm>
-        <a:off x="3181" y="54560"/>
-        <a:ext cx="3101634" cy="785363"/>
+        <a:off x="3181" y="23402"/>
+        <a:ext cx="3101634" cy="825033"/>
       </dsp:txXfrm>
     </dsp:sp>
     <dsp:sp modelId="{1C498423-64E6-FD4E-AA73-2B573B30F0F6}">
@@ -10738,8 +10705,8 @@
       </dsp:nvSpPr>
       <dsp:spPr>
         <a:xfrm>
-          <a:off x="3181" y="839924"/>
-          <a:ext cx="3101634" cy="2234429"/>
+          <a:off x="3181" y="848436"/>
+          <a:ext cx="3101634" cy="2257076"/>
         </a:xfrm>
         <a:prstGeom prst="rect">
           <a:avLst/>
@@ -10773,12 +10740,12 @@
         <a:fontRef idx="minor"/>
       </dsp:style>
       <dsp:txBody>
-        <a:bodyPr spcFirstLastPara="0" vert="horz" wrap="square" lIns="117348" tIns="117348" rIns="156464" bIns="176022" numCol="1" spcCol="1270" anchor="t" anchorCtr="0">
+        <a:bodyPr spcFirstLastPara="0" vert="horz" wrap="square" lIns="122682" tIns="122682" rIns="163576" bIns="184023" numCol="1" spcCol="1270" anchor="t" anchorCtr="0">
           <a:noAutofit/>
         </a:bodyPr>
         <a:lstStyle/>
         <a:p>
-          <a:pPr marL="228600" lvl="1" indent="-228600" algn="l" defTabSz="977900" rtl="0">
+          <a:pPr marL="228600" lvl="1" indent="-228600" algn="l" defTabSz="1022350" rtl="0">
             <a:lnSpc>
               <a:spcPct val="90000"/>
             </a:lnSpc>
@@ -10791,12 +10758,12 @@
             <a:buChar char="•"/>
           </a:pPr>
           <a:r>
-            <a:rPr lang="en-US" sz="2200" kern="1200" dirty="0"/>
-            <a:t>Predict when spreads will exceed threshold</a:t>
+            <a:rPr lang="en-US" sz="2300" kern="1200" dirty="0"/>
+            <a:t>Time-to-Opportunity forecasting</a:t>
           </a:r>
         </a:p>
         <a:p>
-          <a:pPr marL="228600" lvl="1" indent="-228600" algn="l" defTabSz="977900" rtl="0">
+          <a:pPr marL="228600" lvl="1" indent="-228600" algn="l" defTabSz="1022350" rtl="0">
             <a:lnSpc>
               <a:spcPct val="90000"/>
             </a:lnSpc>
@@ -10809,32 +10776,14 @@
             <a:buChar char="•"/>
           </a:pPr>
           <a:r>
-            <a:rPr lang="en-US" sz="2200" kern="1200" dirty="0"/>
-            <a:t>Time-to-Opportunity forecasting</a:t>
-          </a:r>
-        </a:p>
-        <a:p>
-          <a:pPr marL="228600" lvl="1" indent="-228600" algn="l" defTabSz="977900" rtl="0">
-            <a:lnSpc>
-              <a:spcPct val="90000"/>
-            </a:lnSpc>
-            <a:spcBef>
-              <a:spcPct val="0"/>
-            </a:spcBef>
-            <a:spcAft>
-              <a:spcPct val="15000"/>
-            </a:spcAft>
-            <a:buChar char="•"/>
-          </a:pPr>
-          <a:r>
-            <a:rPr lang="en-US" sz="2200" kern="1200" dirty="0"/>
+            <a:rPr lang="en-US" sz="2300" kern="1200" dirty="0"/>
             <a:t>Probability scoring</a:t>
           </a:r>
         </a:p>
       </dsp:txBody>
       <dsp:txXfrm>
-        <a:off x="3181" y="839924"/>
-        <a:ext cx="3101634" cy="2234429"/>
+        <a:off x="3181" y="848436"/>
+        <a:ext cx="3101634" cy="2257076"/>
       </dsp:txXfrm>
     </dsp:sp>
     <dsp:sp modelId="{CC8068B4-6C96-6D42-865D-43D4149B2736}">
@@ -10844,8 +10793,8 @@
       </dsp:nvSpPr>
       <dsp:spPr>
         <a:xfrm>
-          <a:off x="3539043" y="54560"/>
-          <a:ext cx="3101634" cy="785363"/>
+          <a:off x="3539043" y="23402"/>
+          <a:ext cx="3101634" cy="825033"/>
         </a:xfrm>
         <a:prstGeom prst="rect">
           <a:avLst/>
@@ -10879,12 +10828,12 @@
         </a:fontRef>
       </dsp:style>
       <dsp:txBody>
-        <a:bodyPr spcFirstLastPara="0" vert="horz" wrap="square" lIns="156464" tIns="89408" rIns="156464" bIns="89408" numCol="1" spcCol="1270" anchor="ctr" anchorCtr="0">
+        <a:bodyPr spcFirstLastPara="0" vert="horz" wrap="square" lIns="163576" tIns="93472" rIns="163576" bIns="93472" numCol="1" spcCol="1270" anchor="ctr" anchorCtr="0">
           <a:noAutofit/>
         </a:bodyPr>
         <a:lstStyle/>
         <a:p>
-          <a:pPr marL="0" lvl="0" indent="0" algn="ctr" defTabSz="977900" rtl="0">
+          <a:pPr marL="0" lvl="0" indent="0" algn="ctr" defTabSz="1022350" rtl="0">
             <a:lnSpc>
               <a:spcPct val="90000"/>
             </a:lnSpc>
@@ -10897,14 +10846,14 @@
             <a:buNone/>
           </a:pPr>
           <a:r>
-            <a:rPr lang="en-US" sz="2200" kern="1200" dirty="0"/>
+            <a:rPr lang="en-US" sz="2300" kern="1200" dirty="0"/>
             <a:t>Duration Estimation</a:t>
           </a:r>
         </a:p>
       </dsp:txBody>
       <dsp:txXfrm>
-        <a:off x="3539043" y="54560"/>
-        <a:ext cx="3101634" cy="785363"/>
+        <a:off x="3539043" y="23402"/>
+        <a:ext cx="3101634" cy="825033"/>
       </dsp:txXfrm>
     </dsp:sp>
     <dsp:sp modelId="{EAB164AC-F755-6D46-B650-DA5DC41E47B9}">
@@ -10914,8 +10863,8 @@
       </dsp:nvSpPr>
       <dsp:spPr>
         <a:xfrm>
-          <a:off x="3539043" y="839924"/>
-          <a:ext cx="3101634" cy="2234429"/>
+          <a:off x="3539043" y="848436"/>
+          <a:ext cx="3101634" cy="2257076"/>
         </a:xfrm>
         <a:prstGeom prst="rect">
           <a:avLst/>
@@ -10949,12 +10898,12 @@
         <a:fontRef idx="minor"/>
       </dsp:style>
       <dsp:txBody>
-        <a:bodyPr spcFirstLastPara="0" vert="horz" wrap="square" lIns="117348" tIns="117348" rIns="156464" bIns="176022" numCol="1" spcCol="1270" anchor="t" anchorCtr="0">
+        <a:bodyPr spcFirstLastPara="0" vert="horz" wrap="square" lIns="122682" tIns="122682" rIns="163576" bIns="184023" numCol="1" spcCol="1270" anchor="t" anchorCtr="0">
           <a:noAutofit/>
         </a:bodyPr>
         <a:lstStyle/>
         <a:p>
-          <a:pPr marL="228600" lvl="1" indent="-228600" algn="l" defTabSz="977900" rtl="0">
+          <a:pPr marL="228600" lvl="1" indent="-228600" algn="l" defTabSz="1022350" rtl="0">
             <a:lnSpc>
               <a:spcPct val="90000"/>
             </a:lnSpc>
@@ -10967,12 +10916,12 @@
             <a:buChar char="•"/>
           </a:pPr>
           <a:r>
-            <a:rPr lang="en-US" sz="2200" kern="1200" dirty="0"/>
-            <a:t>How long opportunity last?</a:t>
+            <a:rPr lang="en-US" sz="2300" kern="1200" dirty="0"/>
+            <a:t>How long opportunity lasts?</a:t>
           </a:r>
         </a:p>
         <a:p>
-          <a:pPr marL="228600" lvl="1" indent="-228600" algn="l" defTabSz="977900" rtl="0">
+          <a:pPr marL="228600" lvl="1" indent="-228600" algn="l" defTabSz="1022350" rtl="0">
             <a:lnSpc>
               <a:spcPct val="90000"/>
             </a:lnSpc>
@@ -10985,14 +10934,14 @@
             <a:buChar char="•"/>
           </a:pPr>
           <a:r>
-            <a:rPr lang="en-US" sz="2200" kern="1200" dirty="0"/>
-            <a:t>Execution window optimization</a:t>
+            <a:rPr lang="en-US" sz="2300" kern="1200" dirty="0"/>
+            <a:t>Execution window optimization (choose between tactics)</a:t>
           </a:r>
         </a:p>
       </dsp:txBody>
       <dsp:txXfrm>
-        <a:off x="3539043" y="839924"/>
-        <a:ext cx="3101634" cy="2234429"/>
+        <a:off x="3539043" y="848436"/>
+        <a:ext cx="3101634" cy="2257076"/>
       </dsp:txXfrm>
     </dsp:sp>
     <dsp:sp modelId="{13271ECE-3FAB-C742-9035-570626AD0680}">
@@ -11002,8 +10951,8 @@
       </dsp:nvSpPr>
       <dsp:spPr>
         <a:xfrm>
-          <a:off x="7074906" y="54560"/>
-          <a:ext cx="3101634" cy="785363"/>
+          <a:off x="7074906" y="23402"/>
+          <a:ext cx="3101634" cy="825033"/>
         </a:xfrm>
         <a:prstGeom prst="rect">
           <a:avLst/>
@@ -11037,12 +10986,12 @@
         </a:fontRef>
       </dsp:style>
       <dsp:txBody>
-        <a:bodyPr spcFirstLastPara="0" vert="horz" wrap="square" lIns="156464" tIns="89408" rIns="156464" bIns="89408" numCol="1" spcCol="1270" anchor="ctr" anchorCtr="0">
+        <a:bodyPr spcFirstLastPara="0" vert="horz" wrap="square" lIns="163576" tIns="93472" rIns="163576" bIns="93472" numCol="1" spcCol="1270" anchor="ctr" anchorCtr="0">
           <a:noAutofit/>
         </a:bodyPr>
         <a:lstStyle/>
         <a:p>
-          <a:pPr marL="0" lvl="0" indent="0" algn="ctr" defTabSz="977900" rtl="0">
+          <a:pPr marL="0" lvl="0" indent="0" algn="ctr" defTabSz="1022350" rtl="0">
             <a:lnSpc>
               <a:spcPct val="90000"/>
             </a:lnSpc>
@@ -11055,14 +11004,14 @@
             <a:buNone/>
           </a:pPr>
           <a:r>
-            <a:rPr lang="en-US" sz="2200" kern="1200" dirty="0"/>
+            <a:rPr lang="en-US" sz="2300" kern="1200" dirty="0"/>
             <a:t>Profitability Classification</a:t>
           </a:r>
         </a:p>
       </dsp:txBody>
       <dsp:txXfrm>
-        <a:off x="7074906" y="54560"/>
-        <a:ext cx="3101634" cy="785363"/>
+        <a:off x="7074906" y="23402"/>
+        <a:ext cx="3101634" cy="825033"/>
       </dsp:txXfrm>
     </dsp:sp>
     <dsp:sp modelId="{56988011-5148-E247-BA6F-9605331566C0}">
@@ -11072,8 +11021,8 @@
       </dsp:nvSpPr>
       <dsp:spPr>
         <a:xfrm>
-          <a:off x="7074906" y="839924"/>
-          <a:ext cx="3101634" cy="2234429"/>
+          <a:off x="7074906" y="848436"/>
+          <a:ext cx="3101634" cy="2257076"/>
         </a:xfrm>
         <a:prstGeom prst="rect">
           <a:avLst/>
@@ -11107,12 +11056,12 @@
         <a:fontRef idx="minor"/>
       </dsp:style>
       <dsp:txBody>
-        <a:bodyPr spcFirstLastPara="0" vert="horz" wrap="square" lIns="117348" tIns="117348" rIns="156464" bIns="176022" numCol="1" spcCol="1270" anchor="t" anchorCtr="0">
+        <a:bodyPr spcFirstLastPara="0" vert="horz" wrap="square" lIns="122682" tIns="122682" rIns="163576" bIns="184023" numCol="1" spcCol="1270" anchor="t" anchorCtr="0">
           <a:noAutofit/>
         </a:bodyPr>
         <a:lstStyle/>
         <a:p>
-          <a:pPr marL="228600" lvl="1" indent="-228600" algn="l" defTabSz="977900" rtl="0">
+          <a:pPr marL="228600" lvl="1" indent="-228600" algn="l" defTabSz="1022350" rtl="0">
             <a:lnSpc>
               <a:spcPct val="90000"/>
             </a:lnSpc>
@@ -11125,12 +11074,12 @@
             <a:buChar char="•"/>
           </a:pPr>
           <a:r>
-            <a:rPr lang="en-US" sz="2200" kern="1200" dirty="0"/>
+            <a:rPr lang="en-US" sz="2300" kern="1200" dirty="0"/>
             <a:t>Account for slippage</a:t>
           </a:r>
         </a:p>
         <a:p>
-          <a:pPr marL="228600" lvl="1" indent="-228600" algn="l" defTabSz="977900" rtl="0">
+          <a:pPr marL="228600" lvl="1" indent="-228600" algn="l" defTabSz="1022350" rtl="0">
             <a:lnSpc>
               <a:spcPct val="90000"/>
             </a:lnSpc>
@@ -11143,12 +11092,12 @@
             <a:buChar char="•"/>
           </a:pPr>
           <a:r>
-            <a:rPr lang="en-US" sz="2200" kern="1200" dirty="0"/>
+            <a:rPr lang="en-US" sz="2300" kern="1200" dirty="0"/>
             <a:t>Volume constraints</a:t>
           </a:r>
         </a:p>
         <a:p>
-          <a:pPr marL="228600" lvl="1" indent="-228600" algn="l" defTabSz="977900" rtl="0">
+          <a:pPr marL="228600" lvl="1" indent="-228600" algn="l" defTabSz="1022350" rtl="0">
             <a:lnSpc>
               <a:spcPct val="90000"/>
             </a:lnSpc>
@@ -11161,14 +11110,14 @@
             <a:buChar char="•"/>
           </a:pPr>
           <a:r>
-            <a:rPr lang="en-US" sz="2200" kern="1200" dirty="0"/>
+            <a:rPr lang="en-US" sz="2300" kern="1200" dirty="0"/>
             <a:t>Risk-adjusted returns</a:t>
           </a:r>
         </a:p>
       </dsp:txBody>
       <dsp:txXfrm>
-        <a:off x="7074906" y="839924"/>
-        <a:ext cx="3101634" cy="2234429"/>
+        <a:off x="7074906" y="848436"/>
+        <a:ext cx="3101634" cy="2257076"/>
       </dsp:txXfrm>
     </dsp:sp>
   </dsp:spTree>
@@ -28672,6 +28621,390 @@
         <p:cNvPr id="1" name="">
           <a:extLst>
             <a:ext uri="{FF2B5EF4-FFF2-40B4-BE49-F238E27FC236}">
+              <a16:creationId xmlns:a16="http://schemas.microsoft.com/office/drawing/2014/main" id="{9D63AEE1-4F2F-D164-0E20-8BF555720D03}"/>
+            </a:ext>
+          </a:extLst>
+        </p:cNvPr>
+        <p:cNvGrpSpPr/>
+        <p:nvPr/>
+      </p:nvGrpSpPr>
+      <p:grpSpPr>
+        <a:xfrm>
+          <a:off x="0" y="0"/>
+          <a:ext cx="0" cy="0"/>
+          <a:chOff x="0" y="0"/>
+          <a:chExt cx="0" cy="0"/>
+        </a:xfrm>
+      </p:grpSpPr>
+      <p:sp>
+        <p:nvSpPr>
+          <p:cNvPr id="70" name="PlaceHolder 1">
+            <a:extLst>
+              <a:ext uri="{FF2B5EF4-FFF2-40B4-BE49-F238E27FC236}">
+                <a16:creationId xmlns:a16="http://schemas.microsoft.com/office/drawing/2014/main" id="{B70AD439-5E15-4727-A783-B30EB2489B2F}"/>
+              </a:ext>
+            </a:extLst>
+          </p:cNvPr>
+          <p:cNvSpPr>
+            <a:spLocks noGrp="1"/>
+          </p:cNvSpPr>
+          <p:nvPr>
+            <p:ph type="title"/>
+          </p:nvPr>
+        </p:nvSpPr>
+        <p:spPr>
+          <a:prstGeom prst="rect">
+            <a:avLst/>
+          </a:prstGeom>
+          <a:noFill/>
+          <a:ln w="0">
+            <a:noFill/>
+          </a:ln>
+        </p:spPr>
+        <p:txBody>
+          <a:bodyPr lIns="91440" tIns="45720" rIns="91440" bIns="45720" anchor="b">
+            <a:noAutofit/>
+          </a:bodyPr>
+          <a:lstStyle/>
+          <a:p>
+            <a:pPr indent="0" defTabSz="914400">
+              <a:lnSpc>
+                <a:spcPct val="120000"/>
+              </a:lnSpc>
+              <a:buNone/>
+              <a:tabLst>
+                <a:tab pos="0" algn="l"/>
+              </a:tabLst>
+            </a:pPr>
+            <a:r>
+              <a:rPr lang="en-IL" sz="3600" b="0" u="none" strike="noStrike" cap="all" spc="300" dirty="0">
+                <a:solidFill>
+                  <a:srgbClr val="FFFFFF"/>
+                </a:solidFill>
+                <a:effectLst/>
+                <a:highlight>
+                  <a:srgbClr val="000000"/>
+                </a:highlight>
+                <a:uFillTx/>
+                <a:latin typeface="Grandview"/>
+              </a:rPr>
+              <a:t>SEGMENT 2: FEATUrE ENGINEREEING</a:t>
+            </a:r>
+            <a:endParaRPr lang="en-US" sz="3600" b="0" u="none" strike="noStrike" dirty="0">
+              <a:solidFill>
+                <a:srgbClr val="000000"/>
+              </a:solidFill>
+              <a:effectLst/>
+              <a:uFillTx/>
+              <a:latin typeface="Arial"/>
+            </a:endParaRPr>
+          </a:p>
+        </p:txBody>
+      </p:sp>
+      <p:sp>
+        <p:nvSpPr>
+          <p:cNvPr id="8" name="Text Placeholder 7">
+            <a:extLst>
+              <a:ext uri="{FF2B5EF4-FFF2-40B4-BE49-F238E27FC236}">
+                <a16:creationId xmlns:a16="http://schemas.microsoft.com/office/drawing/2014/main" id="{3D69964D-4B92-7487-230C-8B87534765C5}"/>
+              </a:ext>
+            </a:extLst>
+          </p:cNvPr>
+          <p:cNvSpPr>
+            <a:spLocks noGrp="1"/>
+          </p:cNvSpPr>
+          <p:nvPr>
+            <p:ph type="body"/>
+          </p:nvPr>
+        </p:nvSpPr>
+        <p:spPr/>
+        <p:txBody>
+          <a:bodyPr/>
+          <a:lstStyle/>
+          <a:p>
+            <a:r>
+              <a:rPr lang="en-US" sz="1600" i="1" dirty="0"/>
+              <a:t>“From Raw Data to Predictive Features”</a:t>
+            </a:r>
+          </a:p>
+          <a:p>
+            <a:r>
+              <a:rPr lang="en-US" sz="1600" i="1" dirty="0"/>
+              <a:t>Raw Data limitations</a:t>
+            </a:r>
+          </a:p>
+          <a:p>
+            <a:pPr lvl="1"/>
+            <a:r>
+              <a:rPr lang="en-US" sz="1600" i="1" dirty="0"/>
+              <a:t>Only shows what happened</a:t>
+            </a:r>
+          </a:p>
+          <a:p>
+            <a:pPr lvl="1"/>
+            <a:r>
+              <a:rPr lang="en-US" sz="1600" i="1" dirty="0"/>
+              <a:t>Doesn’t show relationships between exchanges</a:t>
+            </a:r>
+          </a:p>
+          <a:p>
+            <a:pPr lvl="1"/>
+            <a:r>
+              <a:rPr lang="en-US" sz="1600" i="1" dirty="0"/>
+              <a:t>Misses temporal patterns and trends</a:t>
+            </a:r>
+          </a:p>
+          <a:p>
+            <a:r>
+              <a:rPr lang="en-US" sz="1600" i="1" dirty="0"/>
+              <a:t>Feature engineering reveals much more</a:t>
+            </a:r>
+          </a:p>
+          <a:p>
+            <a:pPr lvl="1"/>
+            <a:r>
+              <a:rPr lang="en-US" sz="1600" b="1" i="1" dirty="0"/>
+              <a:t>Arbitrage opportunists</a:t>
+            </a:r>
+            <a:r>
+              <a:rPr lang="en-US" sz="1600" i="1" dirty="0"/>
+              <a:t> – price differences across exchanges</a:t>
+            </a:r>
+          </a:p>
+          <a:p>
+            <a:pPr lvl="1"/>
+            <a:r>
+              <a:rPr lang="en-US" sz="1600" b="1" i="1" dirty="0"/>
+              <a:t>Liquidity constraints </a:t>
+            </a:r>
+            <a:r>
+              <a:rPr lang="en-US" sz="1600" i="1" dirty="0"/>
+              <a:t>– Can we actually execute?</a:t>
+            </a:r>
+          </a:p>
+          <a:p>
+            <a:pPr lvl="1"/>
+            <a:r>
+              <a:rPr lang="en-US" sz="1600" b="1" i="1" dirty="0"/>
+              <a:t>Market patterns </a:t>
+            </a:r>
+            <a:r>
+              <a:rPr lang="en-US" sz="1600" i="1" dirty="0"/>
+              <a:t>– When and where opportunities occur</a:t>
+            </a:r>
+          </a:p>
+          <a:p>
+            <a:pPr lvl="1"/>
+            <a:r>
+              <a:rPr lang="en-US" sz="1600" b="1" i="1" dirty="0"/>
+              <a:t>Risk indicators </a:t>
+            </a:r>
+            <a:r>
+              <a:rPr lang="en-US" sz="1600" i="1" dirty="0"/>
+              <a:t>– How volatile is the opportunity?</a:t>
+            </a:r>
+          </a:p>
+          <a:p>
+            <a:pPr lvl="1"/>
+            <a:r>
+              <a:rPr lang="en-US" sz="1600" b="1" i="1" dirty="0"/>
+              <a:t>Predictive signals </a:t>
+            </a:r>
+            <a:r>
+              <a:rPr lang="en-US" sz="1600" i="1" dirty="0"/>
+              <a:t>– what might happen next?</a:t>
+            </a:r>
+          </a:p>
+          <a:p>
+            <a:r>
+              <a:rPr lang="en-US" sz="1600" dirty="0"/>
+              <a:t>Raw Data (~30 columns) -&gt;</a:t>
+            </a:r>
+            <a:r>
+              <a:rPr lang="en-US" sz="1600" dirty="0">
+                <a:latin typeface="Grandview Display" panose="020B0502040204020203" pitchFamily="34" charset="0"/>
+              </a:rPr>
+              <a:t> 4 </a:t>
+            </a:r>
+            <a:r>
+              <a:rPr lang="en-US" sz="1600" dirty="0"/>
+              <a:t>layers F.E Pyramid -&gt; Featured Data (~153 columns)</a:t>
+            </a:r>
+          </a:p>
+          <a:p>
+            <a:r>
+              <a:rPr lang="en-US" sz="1600" dirty="0"/>
+              <a:t>Features added to featured_data CSVs (float, string, enum)</a:t>
+            </a:r>
+          </a:p>
+          <a:p>
+            <a:r>
+              <a:rPr lang="en-US" sz="1600" dirty="0"/>
+              <a:t>Stand-alone args plotter (WIP)</a:t>
+            </a:r>
+          </a:p>
+          <a:p>
+            <a:endParaRPr lang="en-US" sz="1600" dirty="0"/>
+          </a:p>
+        </p:txBody>
+      </p:sp>
+    </p:spTree>
+    <p:extLst>
+      <p:ext uri="{BB962C8B-B14F-4D97-AF65-F5344CB8AC3E}">
+        <p14:creationId xmlns:p14="http://schemas.microsoft.com/office/powerpoint/2010/main" val="1991026259"/>
+      </p:ext>
+    </p:extLst>
+  </p:cSld>
+  <p:clrMapOvr>
+    <a:masterClrMapping/>
+  </p:clrMapOvr>
+</p:sld>
+</file>
+
+<file path=ppt/slides/slide11.xml><?xml version="1.0" encoding="utf-8"?>
+<p:sld xmlns:a="http://schemas.openxmlformats.org/drawingml/2006/main" xmlns:r="http://schemas.openxmlformats.org/officeDocument/2006/relationships" xmlns:p="http://schemas.openxmlformats.org/presentationml/2006/main">
+  <p:cSld>
+    <p:spTree>
+      <p:nvGrpSpPr>
+        <p:cNvPr id="1" name=""/>
+        <p:cNvGrpSpPr/>
+        <p:nvPr/>
+      </p:nvGrpSpPr>
+      <p:grpSpPr>
+        <a:xfrm>
+          <a:off x="0" y="0"/>
+          <a:ext cx="0" cy="0"/>
+          <a:chOff x="0" y="0"/>
+          <a:chExt cx="0" cy="0"/>
+        </a:xfrm>
+      </p:grpSpPr>
+      <p:sp>
+        <p:nvSpPr>
+          <p:cNvPr id="4" name="Title 3">
+            <a:extLst>
+              <a:ext uri="{FF2B5EF4-FFF2-40B4-BE49-F238E27FC236}">
+                <a16:creationId xmlns:a16="http://schemas.microsoft.com/office/drawing/2014/main" id="{23192FBB-431B-311A-D051-54F5D52AA7B1}"/>
+              </a:ext>
+            </a:extLst>
+          </p:cNvPr>
+          <p:cNvSpPr>
+            <a:spLocks noGrp="1"/>
+          </p:cNvSpPr>
+          <p:nvPr>
+            <p:ph type="title"/>
+          </p:nvPr>
+        </p:nvSpPr>
+        <p:spPr/>
+        <p:txBody>
+          <a:bodyPr/>
+          <a:lstStyle/>
+          <a:p>
+            <a:r>
+              <a:rPr lang="en-IL" sz="3600" cap="all" spc="300" dirty="0">
+                <a:solidFill>
+                  <a:srgbClr val="FFFFFF"/>
+                </a:solidFill>
+                <a:highlight>
+                  <a:srgbClr val="000000"/>
+                </a:highlight>
+                <a:latin typeface="Grandview"/>
+              </a:rPr>
+              <a:t>SEGMENT</a:t>
+            </a:r>
+            <a:r>
+              <a:rPr lang="en-IL" sz="3600" cap="all" spc="300" dirty="0">
+                <a:solidFill>
+                  <a:srgbClr val="FFFFFF"/>
+                </a:solidFill>
+                <a:highlight>
+                  <a:srgbClr val="000000"/>
+                </a:highlight>
+              </a:rPr>
+              <a:t> 2: Feature categories</a:t>
+            </a:r>
+            <a:endParaRPr lang="en-IL" sz="3600" dirty="0">
+              <a:latin typeface="Grandview Display" panose="020B0502040204020203" pitchFamily="34" charset="0"/>
+            </a:endParaRPr>
+          </a:p>
+        </p:txBody>
+      </p:sp>
+      <p:graphicFrame>
+        <p:nvGraphicFramePr>
+          <p:cNvPr id="6" name="Diagram 5">
+            <a:extLst>
+              <a:ext uri="{FF2B5EF4-FFF2-40B4-BE49-F238E27FC236}">
+                <a16:creationId xmlns:a16="http://schemas.microsoft.com/office/drawing/2014/main" id="{19487102-50C8-F232-3895-67CDB5B80081}"/>
+              </a:ext>
+            </a:extLst>
+          </p:cNvPr>
+          <p:cNvGraphicFramePr/>
+          <p:nvPr>
+            <p:extLst>
+              <p:ext uri="{D42A27DB-BD31-4B8C-83A1-F6EECF244321}">
+                <p14:modId xmlns:p14="http://schemas.microsoft.com/office/powerpoint/2010/main" val="2885728409"/>
+              </p:ext>
+            </p:extLst>
+          </p:nvPr>
+        </p:nvGraphicFramePr>
+        <p:xfrm>
+          <a:off x="523433" y="2060294"/>
+          <a:ext cx="5329499" cy="4022745"/>
+        </p:xfrm>
+        <a:graphic>
+          <a:graphicData uri="http://schemas.openxmlformats.org/drawingml/2006/diagram">
+            <dgm:relIds xmlns:dgm="http://schemas.openxmlformats.org/drawingml/2006/diagram" xmlns:r="http://schemas.openxmlformats.org/officeDocument/2006/relationships" r:dm="rId2" r:lo="rId3" r:qs="rId4" r:cs="rId5"/>
+          </a:graphicData>
+        </a:graphic>
+      </p:graphicFrame>
+      <p:graphicFrame>
+        <p:nvGraphicFramePr>
+          <p:cNvPr id="7" name="Diagram 6">
+            <a:extLst>
+              <a:ext uri="{FF2B5EF4-FFF2-40B4-BE49-F238E27FC236}">
+                <a16:creationId xmlns:a16="http://schemas.microsoft.com/office/drawing/2014/main" id="{8034AA49-23B3-0833-A43F-E9E1903113AF}"/>
+              </a:ext>
+            </a:extLst>
+          </p:cNvPr>
+          <p:cNvGraphicFramePr/>
+          <p:nvPr>
+            <p:extLst>
+              <p:ext uri="{D42A27DB-BD31-4B8C-83A1-F6EECF244321}">
+                <p14:modId xmlns:p14="http://schemas.microsoft.com/office/powerpoint/2010/main" val="82030664"/>
+              </p:ext>
+            </p:extLst>
+          </p:nvPr>
+        </p:nvGraphicFramePr>
+        <p:xfrm>
+          <a:off x="6119150" y="2071869"/>
+          <a:ext cx="5329499" cy="4022745"/>
+        </p:xfrm>
+        <a:graphic>
+          <a:graphicData uri="http://schemas.openxmlformats.org/drawingml/2006/diagram">
+            <dgm:relIds xmlns:dgm="http://schemas.openxmlformats.org/drawingml/2006/diagram" xmlns:r="http://schemas.openxmlformats.org/officeDocument/2006/relationships" r:dm="rId7" r:lo="rId8" r:qs="rId9" r:cs="rId10"/>
+          </a:graphicData>
+        </a:graphic>
+      </p:graphicFrame>
+    </p:spTree>
+    <p:extLst>
+      <p:ext uri="{BB962C8B-B14F-4D97-AF65-F5344CB8AC3E}">
+        <p14:creationId xmlns:p14="http://schemas.microsoft.com/office/powerpoint/2010/main" val="279716472"/>
+      </p:ext>
+    </p:extLst>
+  </p:cSld>
+  <p:clrMapOvr>
+    <a:masterClrMapping/>
+  </p:clrMapOvr>
+</p:sld>
+</file>
+
+<file path=ppt/slides/slide12.xml><?xml version="1.0" encoding="utf-8"?>
+<p:sld xmlns:a="http://schemas.openxmlformats.org/drawingml/2006/main" xmlns:r="http://schemas.openxmlformats.org/officeDocument/2006/relationships" xmlns:p="http://schemas.openxmlformats.org/presentationml/2006/main">
+  <p:cSld>
+    <p:spTree>
+      <p:nvGrpSpPr>
+        <p:cNvPr id="1" name="">
+          <a:extLst>
+            <a:ext uri="{FF2B5EF4-FFF2-40B4-BE49-F238E27FC236}">
               <a16:creationId xmlns:a16="http://schemas.microsoft.com/office/drawing/2014/main" id="{97633B45-07C4-EEAD-22CB-9E3464C23EDB}"/>
             </a:ext>
           </a:extLst>
@@ -29663,16 +29996,7 @@
                 <a:effectLst/>
                 <a:latin typeface="Menlo" panose="020B0609030804020204" pitchFamily="49" charset="0"/>
               </a:rPr>
-              <a:t># Layer 3: Trend Indicators (for later </a:t>
-            </a:r>
-            <a:r>
-              <a:rPr lang="en-US" sz="1000" dirty="0">
-                <a:solidFill>
-                  <a:srgbClr val="6A9955"/>
-                </a:solidFill>
-                <a:latin typeface="Menlo" panose="020B0609030804020204" pitchFamily="49" charset="0"/>
-              </a:rPr>
-              <a:t>use – ML model)</a:t>
+              <a:t># Layer 3: Trend Indicators</a:t>
             </a:r>
             <a:endParaRPr lang="en-US" sz="1000" b="0" dirty="0">
               <a:solidFill>
@@ -30020,7 +30344,7 @@
                 <a:effectLst/>
                 <a:latin typeface="Menlo" panose="020B0609030804020204" pitchFamily="49" charset="0"/>
               </a:rPr>
-              <a:t># Layer 4: Predictive Signals (for later use – ML model)</a:t>
+              <a:t># Layer 4: Predictive Signals</a:t>
             </a:r>
             <a:endParaRPr lang="en-US" sz="1000" b="0" dirty="0">
               <a:solidFill>
@@ -30493,7 +30817,7 @@
 </p:sld>
 </file>
 
-<file path=ppt/slides/slide11.xml><?xml version="1.0" encoding="utf-8"?>
+<file path=ppt/slides/slide13.xml><?xml version="1.0" encoding="utf-8"?>
 <p:sld xmlns:a="http://schemas.openxmlformats.org/drawingml/2006/main" xmlns:r="http://schemas.openxmlformats.org/officeDocument/2006/relationships" xmlns:p="http://schemas.openxmlformats.org/presentationml/2006/main">
   <p:cSld>
     <p:spTree>
@@ -30631,15 +30955,20 @@
             <a:pPr lvl="2"/>
             <a:r>
               <a:rPr lang="en-US" sz="1600" dirty="0"/>
-              <a:t>Need sufficient liquidity on both sides</a:t>
+              <a:t>Need sufficient liquidity on both sides (one tactic: hold crypto and funds in each exchange)</a:t>
             </a:r>
           </a:p>
           <a:p>
             <a:pPr lvl="2"/>
             <a:r>
               <a:rPr lang="en-US" sz="1600" dirty="0"/>
-              <a:t>Only ~40% of opportunities have volume &gt;= 50</a:t>
-            </a:r>
+              <a:t>Only ~40% of opportunities have sufficient. </a:t>
+            </a:r>
+            <a:r>
+              <a:rPr lang="en-US" sz="1600" dirty="0" err="1"/>
+              <a:t>voulme</a:t>
+            </a:r>
+            <a:endParaRPr lang="en-US" sz="1600" dirty="0"/>
           </a:p>
           <a:p>
             <a:pPr lvl="1"/>
@@ -30659,7 +30988,7 @@
             <a:pPr lvl="2"/>
             <a:r>
               <a:rPr lang="en-US" sz="1600" dirty="0"/>
-              <a:t>Peak hours: 19:00-21:00 (US-Asia overlap)</a:t>
+              <a:t>Peak hours: 19:00-21:00 UTC (US-Asia overlap)</a:t>
             </a:r>
           </a:p>
           <a:p>
@@ -30727,7 +31056,7 @@
 </p:sld>
 </file>
 
-<file path=ppt/slides/slide12.xml><?xml version="1.0" encoding="utf-8"?>
+<file path=ppt/slides/slide14.xml><?xml version="1.0" encoding="utf-8"?>
 <p:sld xmlns:a="http://schemas.openxmlformats.org/drawingml/2006/main" xmlns:r="http://schemas.openxmlformats.org/officeDocument/2006/relationships" xmlns:p="http://schemas.openxmlformats.org/presentationml/2006/main">
   <p:cSld>
     <p:spTree>
@@ -30862,10 +31191,17 @@
             </a:r>
           </a:p>
           <a:p>
+            <a:pPr lvl="2"/>
+            <a:r>
+              <a:rPr lang="en-US" sz="1600" dirty="0"/>
+              <a:t>New tactic to observe: transfer-sell strategy (more profitable in transactions above 1/3 BTC= 33k$)</a:t>
+            </a:r>
+          </a:p>
+          <a:p>
             <a:pPr lvl="1"/>
             <a:r>
               <a:rPr lang="en-US" sz="2000" dirty="0"/>
-              <a:t>Performance issues (Fragmentation, computational cost)</a:t>
+              <a:t>Performance issues (computational cost)</a:t>
             </a:r>
           </a:p>
           <a:p>
@@ -30931,14 +31267,14 @@
           <p:nvPr>
             <p:extLst>
               <p:ext uri="{D42A27DB-BD31-4B8C-83A1-F6EECF244321}">
-                <p14:modId xmlns:p14="http://schemas.microsoft.com/office/powerpoint/2010/main" val="3200458457"/>
+                <p14:modId xmlns:p14="http://schemas.microsoft.com/office/powerpoint/2010/main" val="2060643611"/>
               </p:ext>
             </p:extLst>
           </p:nvPr>
         </p:nvGraphicFramePr>
         <p:xfrm>
-          <a:off x="7245753" y="4118043"/>
-          <a:ext cx="4734045" cy="2346960"/>
+          <a:off x="6956385" y="4118043"/>
+          <a:ext cx="5023413" cy="2346960"/>
         </p:xfrm>
         <a:graphic>
           <a:graphicData uri="http://schemas.openxmlformats.org/drawingml/2006/table">
@@ -30954,21 +31290,21 @@
                 <a:tableStyleId>{21E4AEA4-8DFA-4A89-87EB-49C32662AFE0}</a:tableStyleId>
               </a:tblPr>
               <a:tblGrid>
-                <a:gridCol w="1608881">
+                <a:gridCol w="1572118">
                   <a:extLst>
                     <a:ext uri="{9D8B030D-6E8A-4147-A177-3AD203B41FA5}">
                       <a16:colId xmlns:a16="http://schemas.microsoft.com/office/drawing/2014/main" val="1458189692"/>
                     </a:ext>
                   </a:extLst>
                 </a:gridCol>
-                <a:gridCol w="1539433">
+                <a:gridCol w="1510709">
                   <a:extLst>
                     <a:ext uri="{9D8B030D-6E8A-4147-A177-3AD203B41FA5}">
                       <a16:colId xmlns:a16="http://schemas.microsoft.com/office/drawing/2014/main" val="707852014"/>
                     </a:ext>
                   </a:extLst>
                 </a:gridCol>
-                <a:gridCol w="1585731">
+                <a:gridCol w="1940586">
                   <a:extLst>
                     <a:ext uri="{9D8B030D-6E8A-4147-A177-3AD203B41FA5}">
                       <a16:colId xmlns:a16="http://schemas.microsoft.com/office/drawing/2014/main" val="188686255"/>
@@ -31253,7 +31589,10 @@
                     <a:bodyPr/>
                     <a:lstStyle/>
                     <a:p>
-                      <a:endParaRPr lang="en-IL" sz="1400" dirty="0"/>
+                      <a:r>
+                        <a:rPr lang="en-IL" sz="1400" dirty="0"/>
+                        <a:t>100$ profit on 100k$</a:t>
+                      </a:r>
                     </a:p>
                   </a:txBody>
                   <a:tcPr/>
@@ -31330,7 +31669,7 @@
         </p:nvSpPr>
         <p:spPr>
           <a:xfrm flipH="1">
-            <a:off x="8559479" y="3803291"/>
+            <a:off x="8293261" y="3803291"/>
             <a:ext cx="2106591" cy="314752"/>
           </a:xfrm>
           <a:prstGeom prst="rect">
@@ -31390,7 +31729,108 @@
 </p:sld>
 </file>
 
-<file path=ppt/slides/slide13.xml><?xml version="1.0" encoding="utf-8"?>
+<file path=ppt/slides/slide15.xml><?xml version="1.0" encoding="utf-8"?>
+<p:sld xmlns:a="http://schemas.openxmlformats.org/drawingml/2006/main" xmlns:r="http://schemas.openxmlformats.org/officeDocument/2006/relationships" xmlns:p="http://schemas.openxmlformats.org/presentationml/2006/main">
+  <p:cSld>
+    <p:spTree>
+      <p:nvGrpSpPr>
+        <p:cNvPr id="1" name="">
+          <a:extLst>
+            <a:ext uri="{FF2B5EF4-FFF2-40B4-BE49-F238E27FC236}">
+              <a16:creationId xmlns:a16="http://schemas.microsoft.com/office/drawing/2014/main" id="{23627675-2692-7C39-3488-CA5755B8E7C0}"/>
+            </a:ext>
+          </a:extLst>
+        </p:cNvPr>
+        <p:cNvGrpSpPr/>
+        <p:nvPr/>
+      </p:nvGrpSpPr>
+      <p:grpSpPr>
+        <a:xfrm>
+          <a:off x="0" y="0"/>
+          <a:ext cx="0" cy="0"/>
+          <a:chOff x="0" y="0"/>
+          <a:chExt cx="0" cy="0"/>
+        </a:xfrm>
+      </p:grpSpPr>
+      <p:sp>
+        <p:nvSpPr>
+          <p:cNvPr id="70" name="PlaceHolder 1">
+            <a:extLst>
+              <a:ext uri="{FF2B5EF4-FFF2-40B4-BE49-F238E27FC236}">
+                <a16:creationId xmlns:a16="http://schemas.microsoft.com/office/drawing/2014/main" id="{8EEC66CF-B87A-340D-6C8C-89BDC45C7968}"/>
+              </a:ext>
+            </a:extLst>
+          </p:cNvPr>
+          <p:cNvSpPr>
+            <a:spLocks noGrp="1"/>
+          </p:cNvSpPr>
+          <p:nvPr>
+            <p:ph type="title"/>
+          </p:nvPr>
+        </p:nvSpPr>
+        <p:spPr>
+          <a:prstGeom prst="rect">
+            <a:avLst/>
+          </a:prstGeom>
+          <a:noFill/>
+          <a:ln w="0">
+            <a:noFill/>
+          </a:ln>
+        </p:spPr>
+        <p:txBody>
+          <a:bodyPr lIns="91440" tIns="45720" rIns="91440" bIns="45720" anchor="b">
+            <a:noAutofit/>
+          </a:bodyPr>
+          <a:lstStyle/>
+          <a:p>
+            <a:pPr indent="0" defTabSz="914400">
+              <a:lnSpc>
+                <a:spcPct val="120000"/>
+              </a:lnSpc>
+              <a:buNone/>
+              <a:tabLst>
+                <a:tab pos="0" algn="l"/>
+              </a:tabLst>
+            </a:pPr>
+            <a:r>
+              <a:rPr lang="en-IL" sz="3600" b="0" u="none" strike="noStrike" cap="all" spc="300" dirty="0">
+                <a:solidFill>
+                  <a:srgbClr val="FFFFFF"/>
+                </a:solidFill>
+                <a:effectLst/>
+                <a:highlight>
+                  <a:srgbClr val="000000"/>
+                </a:highlight>
+                <a:uFillTx/>
+                <a:latin typeface="Grandview"/>
+              </a:rPr>
+              <a:t>SEGMENT 3: ML MODEL</a:t>
+            </a:r>
+            <a:endParaRPr lang="en-US" sz="3600" b="0" u="none" strike="noStrike" dirty="0">
+              <a:solidFill>
+                <a:srgbClr val="000000"/>
+              </a:solidFill>
+              <a:effectLst/>
+              <a:uFillTx/>
+              <a:latin typeface="Arial"/>
+            </a:endParaRPr>
+          </a:p>
+        </p:txBody>
+      </p:sp>
+    </p:spTree>
+    <p:extLst>
+      <p:ext uri="{BB962C8B-B14F-4D97-AF65-F5344CB8AC3E}">
+        <p14:creationId xmlns:p14="http://schemas.microsoft.com/office/powerpoint/2010/main" val="3588974293"/>
+      </p:ext>
+    </p:extLst>
+  </p:cSld>
+  <p:clrMapOvr>
+    <a:masterClrMapping/>
+  </p:clrMapOvr>
+</p:sld>
+</file>
+
+<file path=ppt/slides/slide16.xml><?xml version="1.0" encoding="utf-8"?>
 <p:sld xmlns:a="http://schemas.openxmlformats.org/drawingml/2006/main" xmlns:r="http://schemas.openxmlformats.org/officeDocument/2006/relationships" xmlns:p="http://schemas.openxmlformats.org/presentationml/2006/main">
   <p:cSld>
     <p:spTree>
@@ -31532,7 +31972,7 @@
           <p:nvPr>
             <p:extLst>
               <p:ext uri="{D42A27DB-BD31-4B8C-83A1-F6EECF244321}">
-                <p14:modId xmlns:p14="http://schemas.microsoft.com/office/powerpoint/2010/main" val="728335470"/>
+                <p14:modId xmlns:p14="http://schemas.microsoft.com/office/powerpoint/2010/main" val="3848329744"/>
               </p:ext>
             </p:extLst>
           </p:nvPr>
@@ -31560,7 +32000,7 @@
 </p:sld>
 </file>
 
-<file path=ppt/slides/slide14.xml><?xml version="1.0" encoding="utf-8"?>
+<file path=ppt/slides/slide17.xml><?xml version="1.0" encoding="utf-8"?>
 <p:sld xmlns:a="http://schemas.openxmlformats.org/drawingml/2006/main" xmlns:r="http://schemas.openxmlformats.org/officeDocument/2006/relationships" xmlns:p="http://schemas.openxmlformats.org/presentationml/2006/main" show="0">
   <p:cSld>
     <p:spTree>
@@ -31748,7 +32188,7 @@
 </p:sld>
 </file>
 
-<file path=ppt/slides/slide15.xml><?xml version="1.0" encoding="utf-8"?>
+<file path=ppt/slides/slide18.xml><?xml version="1.0" encoding="utf-8"?>
 <p:sld xmlns:a="http://schemas.openxmlformats.org/drawingml/2006/main" xmlns:r="http://schemas.openxmlformats.org/officeDocument/2006/relationships" xmlns:p="http://schemas.openxmlformats.org/presentationml/2006/main">
   <p:cSld>
     <p:spTree>
@@ -32133,7 +32573,7 @@
 </p:sld>
 </file>
 
-<file path=ppt/slides/slide16.xml><?xml version="1.0" encoding="utf-8"?>
+<file path=ppt/slides/slide19.xml><?xml version="1.0" encoding="utf-8"?>
 <p:sld xmlns:a="http://schemas.openxmlformats.org/drawingml/2006/main" xmlns:r="http://schemas.openxmlformats.org/officeDocument/2006/relationships" xmlns:p="http://schemas.openxmlformats.org/presentationml/2006/main">
   <p:cSld>
     <p:spTree>
@@ -32396,558 +32836,6 @@
               </a:tabLst>
             </a:pPr>
             <a:endParaRPr lang="en-US" sz="2000" b="0" u="none" strike="noStrike">
-              <a:solidFill>
-                <a:srgbClr val="000000"/>
-              </a:solidFill>
-              <a:effectLst/>
-              <a:uFillTx/>
-              <a:latin typeface="Arial"/>
-            </a:endParaRPr>
-          </a:p>
-        </p:txBody>
-      </p:sp>
-    </p:spTree>
-  </p:cSld>
-  <p:clrMapOvr>
-    <a:masterClrMapping/>
-  </p:clrMapOvr>
-</p:sld>
-</file>
-
-<file path=ppt/slides/slide17.xml><?xml version="1.0" encoding="utf-8"?>
-<p:sld xmlns:a="http://schemas.openxmlformats.org/drawingml/2006/main" xmlns:r="http://schemas.openxmlformats.org/officeDocument/2006/relationships" xmlns:p="http://schemas.openxmlformats.org/presentationml/2006/main" show="0">
-  <p:cSld>
-    <p:spTree>
-      <p:nvGrpSpPr>
-        <p:cNvPr id="1" name="">
-          <a:extLst>
-            <a:ext uri="{FF2B5EF4-FFF2-40B4-BE49-F238E27FC236}">
-              <a16:creationId xmlns:a16="http://schemas.microsoft.com/office/drawing/2014/main" id="{B07263C3-0F5C-72E8-AF2D-1D13EF316DBA}"/>
-            </a:ext>
-          </a:extLst>
-        </p:cNvPr>
-        <p:cNvGrpSpPr/>
-        <p:nvPr/>
-      </p:nvGrpSpPr>
-      <p:grpSpPr>
-        <a:xfrm>
-          <a:off x="0" y="0"/>
-          <a:ext cx="0" cy="0"/>
-          <a:chOff x="0" y="0"/>
-          <a:chExt cx="0" cy="0"/>
-        </a:xfrm>
-      </p:grpSpPr>
-      <p:sp>
-        <p:nvSpPr>
-          <p:cNvPr id="77" name="PlaceHolder 1">
-            <a:extLst>
-              <a:ext uri="{FF2B5EF4-FFF2-40B4-BE49-F238E27FC236}">
-                <a16:creationId xmlns:a16="http://schemas.microsoft.com/office/drawing/2014/main" id="{E6CF6C9D-3C19-1AC9-FA18-B2E76560BC4B}"/>
-              </a:ext>
-            </a:extLst>
-          </p:cNvPr>
-          <p:cNvSpPr>
-            <a:spLocks noGrp="1"/>
-          </p:cNvSpPr>
-          <p:nvPr>
-            <p:ph type="title"/>
-          </p:nvPr>
-        </p:nvSpPr>
-        <p:spPr>
-          <a:prstGeom prst="rect">
-            <a:avLst/>
-          </a:prstGeom>
-          <a:noFill/>
-          <a:ln w="0">
-            <a:noFill/>
-          </a:ln>
-        </p:spPr>
-        <p:txBody>
-          <a:bodyPr lIns="91440" tIns="45720" rIns="91440" bIns="45720" anchor="b">
-            <a:noAutofit/>
-          </a:bodyPr>
-          <a:lstStyle/>
-          <a:p>
-            <a:pPr indent="0" defTabSz="914400">
-              <a:lnSpc>
-                <a:spcPct val="120000"/>
-              </a:lnSpc>
-              <a:buNone/>
-              <a:tabLst>
-                <a:tab pos="0" algn="l"/>
-              </a:tabLst>
-            </a:pPr>
-            <a:r>
-              <a:rPr lang="en-IL" sz="3600" b="0" u="none" strike="noStrike" cap="all" spc="300" dirty="0">
-                <a:solidFill>
-                  <a:srgbClr val="FFFFFF"/>
-                </a:solidFill>
-                <a:effectLst/>
-                <a:highlight>
-                  <a:srgbClr val="000000"/>
-                </a:highlight>
-                <a:uFillTx/>
-                <a:latin typeface="Grandview"/>
-              </a:rPr>
-              <a:t>Next steps (FOR FINAL PRESENTATION)</a:t>
-            </a:r>
-            <a:endParaRPr lang="en-US" sz="3600" b="0" u="none" strike="noStrike" dirty="0">
-              <a:solidFill>
-                <a:srgbClr val="000000"/>
-              </a:solidFill>
-              <a:effectLst/>
-              <a:uFillTx/>
-              <a:latin typeface="Arial"/>
-            </a:endParaRPr>
-          </a:p>
-        </p:txBody>
-      </p:sp>
-      <p:sp>
-        <p:nvSpPr>
-          <p:cNvPr id="78" name="PlaceHolder 2">
-            <a:extLst>
-              <a:ext uri="{FF2B5EF4-FFF2-40B4-BE49-F238E27FC236}">
-                <a16:creationId xmlns:a16="http://schemas.microsoft.com/office/drawing/2014/main" id="{3CA7A471-D2B0-6DEC-6752-72F1DE005FC9}"/>
-              </a:ext>
-            </a:extLst>
-          </p:cNvPr>
-          <p:cNvSpPr>
-            <a:spLocks noGrp="1"/>
-          </p:cNvSpPr>
-          <p:nvPr>
-            <p:ph type="body"/>
-          </p:nvPr>
-        </p:nvSpPr>
-        <p:spPr>
-          <a:prstGeom prst="rect">
-            <a:avLst/>
-          </a:prstGeom>
-          <a:noFill/>
-          <a:ln w="0">
-            <a:noFill/>
-          </a:ln>
-        </p:spPr>
-        <p:txBody>
-          <a:bodyPr lIns="91440" tIns="45720" rIns="91440" bIns="45720" anchor="t">
-            <a:noAutofit/>
-          </a:bodyPr>
-          <a:lstStyle/>
-          <a:p>
-            <a:pPr marL="228600" indent="-228600" defTabSz="914400">
-              <a:lnSpc>
-                <a:spcPct val="120000"/>
-              </a:lnSpc>
-              <a:spcBef>
-                <a:spcPts val="1001"/>
-              </a:spcBef>
-              <a:buClr>
-                <a:srgbClr val="000000"/>
-              </a:buClr>
-              <a:buSzPct val="75000"/>
-              <a:buFont typeface="Arial"/>
-              <a:buChar char="•"/>
-            </a:pPr>
-            <a:r>
-              <a:rPr lang="en-US" sz="1800" dirty="0">
-                <a:solidFill>
-                  <a:schemeClr val="dk1"/>
-                </a:solidFill>
-                <a:latin typeface="Grandview Display" panose="020B0502040204020203" pitchFamily="34" charset="0"/>
-              </a:rPr>
-              <a:t>Immediate</a:t>
-            </a:r>
-          </a:p>
-          <a:p>
-            <a:pPr lvl="1">
-              <a:lnSpc>
-                <a:spcPct val="120000"/>
-              </a:lnSpc>
-              <a:spcBef>
-                <a:spcPts val="1001"/>
-              </a:spcBef>
-              <a:buClr>
-                <a:srgbClr val="000000"/>
-              </a:buClr>
-              <a:buSzPct val="75000"/>
-              <a:buFont typeface="Arial"/>
-              <a:buChar char="•"/>
-            </a:pPr>
-            <a:r>
-              <a:rPr lang="en-US" sz="1400" b="0" u="none" strike="noStrike" dirty="0">
-                <a:solidFill>
-                  <a:srgbClr val="000000"/>
-                </a:solidFill>
-                <a:effectLst/>
-                <a:uFillTx/>
-                <a:latin typeface="Grandview Display" panose="020B0502040204020203" pitchFamily="34" charset="0"/>
-              </a:rPr>
-              <a:t>Collect more historical data (weeks/months)</a:t>
-            </a:r>
-          </a:p>
-          <a:p>
-            <a:pPr lvl="1">
-              <a:lnSpc>
-                <a:spcPct val="120000"/>
-              </a:lnSpc>
-              <a:spcBef>
-                <a:spcPts val="1001"/>
-              </a:spcBef>
-              <a:buClr>
-                <a:srgbClr val="000000"/>
-              </a:buClr>
-              <a:buSzPct val="75000"/>
-              <a:buFont typeface="Arial"/>
-              <a:buChar char="•"/>
-            </a:pPr>
-            <a:r>
-              <a:rPr lang="en-US" sz="1400" b="0" u="none" strike="noStrike" dirty="0">
-                <a:solidFill>
-                  <a:srgbClr val="000000"/>
-                </a:solidFill>
-                <a:effectLst/>
-                <a:uFillTx/>
-                <a:latin typeface="Grandview Display" panose="020B0502040204020203" pitchFamily="34" charset="0"/>
-              </a:rPr>
-              <a:t>Implement basic ML model</a:t>
-            </a:r>
-          </a:p>
-          <a:p>
-            <a:pPr lvl="1">
-              <a:lnSpc>
-                <a:spcPct val="120000"/>
-              </a:lnSpc>
-              <a:spcBef>
-                <a:spcPts val="1001"/>
-              </a:spcBef>
-              <a:buClr>
-                <a:srgbClr val="000000"/>
-              </a:buClr>
-              <a:buSzPct val="75000"/>
-              <a:buFont typeface="Arial"/>
-              <a:buChar char="•"/>
-            </a:pPr>
-            <a:r>
-              <a:rPr lang="en-US" sz="1400" dirty="0">
-                <a:solidFill>
-                  <a:srgbClr val="000000"/>
-                </a:solidFill>
-                <a:latin typeface="Grandview Display" panose="020B0502040204020203" pitchFamily="34" charset="0"/>
-              </a:rPr>
-              <a:t>Back test strategies</a:t>
-            </a:r>
-          </a:p>
-          <a:p>
-            <a:pPr>
-              <a:lnSpc>
-                <a:spcPct val="120000"/>
-              </a:lnSpc>
-              <a:spcBef>
-                <a:spcPts val="1001"/>
-              </a:spcBef>
-              <a:buClr>
-                <a:srgbClr val="000000"/>
-              </a:buClr>
-              <a:buSzPct val="75000"/>
-              <a:buFont typeface="Arial"/>
-              <a:buChar char="•"/>
-            </a:pPr>
-            <a:r>
-              <a:rPr lang="en-US" sz="1800" b="0" u="none" strike="noStrike" dirty="0">
-                <a:solidFill>
-                  <a:srgbClr val="000000"/>
-                </a:solidFill>
-                <a:effectLst/>
-                <a:uFillTx/>
-                <a:latin typeface="Grandview Display" panose="020B0502040204020203" pitchFamily="34" charset="0"/>
-              </a:rPr>
-              <a:t>Future Development (product?)</a:t>
-            </a:r>
-          </a:p>
-          <a:p>
-            <a:pPr lvl="1">
-              <a:lnSpc>
-                <a:spcPct val="120000"/>
-              </a:lnSpc>
-              <a:spcBef>
-                <a:spcPts val="1001"/>
-              </a:spcBef>
-              <a:buClr>
-                <a:srgbClr val="000000"/>
-              </a:buClr>
-              <a:buSzPct val="75000"/>
-              <a:buFont typeface="Arial"/>
-              <a:buChar char="•"/>
-            </a:pPr>
-            <a:r>
-              <a:rPr lang="en-US" sz="1400" dirty="0">
-                <a:solidFill>
-                  <a:srgbClr val="000000"/>
-                </a:solidFill>
-                <a:latin typeface="Grandview Display" panose="020B0502040204020203" pitchFamily="34" charset="0"/>
-              </a:rPr>
-              <a:t>Real-time data pipeline</a:t>
-            </a:r>
-          </a:p>
-          <a:p>
-            <a:pPr lvl="1">
-              <a:lnSpc>
-                <a:spcPct val="120000"/>
-              </a:lnSpc>
-              <a:spcBef>
-                <a:spcPts val="1001"/>
-              </a:spcBef>
-              <a:buClr>
-                <a:srgbClr val="000000"/>
-              </a:buClr>
-              <a:buSzPct val="75000"/>
-              <a:buFont typeface="Arial"/>
-              <a:buChar char="•"/>
-            </a:pPr>
-            <a:r>
-              <a:rPr lang="en-US" sz="1400" dirty="0">
-                <a:solidFill>
-                  <a:srgbClr val="000000"/>
-                </a:solidFill>
-                <a:latin typeface="Grandview Display" panose="020B0502040204020203" pitchFamily="34" charset="0"/>
-              </a:rPr>
-              <a:t>Live deployment with paper trading</a:t>
-            </a:r>
-          </a:p>
-          <a:p>
-            <a:pPr lvl="1">
-              <a:lnSpc>
-                <a:spcPct val="120000"/>
-              </a:lnSpc>
-              <a:spcBef>
-                <a:spcPts val="1001"/>
-              </a:spcBef>
-              <a:buClr>
-                <a:srgbClr val="000000"/>
-              </a:buClr>
-              <a:buSzPct val="75000"/>
-              <a:buFont typeface="Arial"/>
-              <a:buChar char="•"/>
-            </a:pPr>
-            <a:r>
-              <a:rPr lang="en-US" sz="1400" b="0" u="none" strike="noStrike" dirty="0">
-                <a:solidFill>
-                  <a:srgbClr val="000000"/>
-                </a:solidFill>
-                <a:effectLst/>
-                <a:uFillTx/>
-                <a:latin typeface="Grandview Display" panose="020B0502040204020203" pitchFamily="34" charset="0"/>
-              </a:rPr>
-              <a:t>Automated trading bot</a:t>
-            </a:r>
-          </a:p>
-          <a:p>
-            <a:pPr lvl="1">
-              <a:lnSpc>
-                <a:spcPct val="120000"/>
-              </a:lnSpc>
-              <a:spcBef>
-                <a:spcPts val="1001"/>
-              </a:spcBef>
-              <a:buClr>
-                <a:srgbClr val="000000"/>
-              </a:buClr>
-              <a:buSzPct val="75000"/>
-              <a:buFont typeface="Arial"/>
-              <a:buChar char="•"/>
-            </a:pPr>
-            <a:r>
-              <a:rPr lang="en-US" sz="1400" b="0" u="none" strike="noStrike" dirty="0">
-                <a:solidFill>
-                  <a:srgbClr val="000000"/>
-                </a:solidFill>
-                <a:effectLst/>
-                <a:uFillTx/>
-                <a:latin typeface="Grandview Display" panose="020B0502040204020203" pitchFamily="34" charset="0"/>
-              </a:rPr>
-              <a:t>Risk management system</a:t>
-            </a:r>
-          </a:p>
-          <a:p>
-            <a:pPr lvl="1">
-              <a:lnSpc>
-                <a:spcPct val="120000"/>
-              </a:lnSpc>
-              <a:spcBef>
-                <a:spcPts val="1001"/>
-              </a:spcBef>
-              <a:buClr>
-                <a:srgbClr val="000000"/>
-              </a:buClr>
-              <a:buSzPct val="75000"/>
-              <a:buFont typeface="Arial"/>
-              <a:buChar char="•"/>
-            </a:pPr>
-            <a:r>
-              <a:rPr lang="en-US" sz="1400" b="0" u="none" strike="noStrike" dirty="0">
-                <a:solidFill>
-                  <a:srgbClr val="000000"/>
-                </a:solidFill>
-                <a:effectLst/>
-                <a:uFillTx/>
-                <a:latin typeface="Grandview Display" panose="020B0502040204020203" pitchFamily="34" charset="0"/>
-              </a:rPr>
-              <a:t>Multi-crypto portfolio optimization</a:t>
-            </a:r>
-          </a:p>
-          <a:p>
-            <a:pPr lvl="1">
-              <a:lnSpc>
-                <a:spcPct val="120000"/>
-              </a:lnSpc>
-              <a:spcBef>
-                <a:spcPts val="1001"/>
-              </a:spcBef>
-              <a:buClr>
-                <a:srgbClr val="000000"/>
-              </a:buClr>
-              <a:buSzPct val="75000"/>
-              <a:buFont typeface="Arial"/>
-              <a:buChar char="•"/>
-            </a:pPr>
-            <a:r>
-              <a:rPr lang="en-US" sz="1400" dirty="0">
-                <a:solidFill>
-                  <a:srgbClr val="000000"/>
-                </a:solidFill>
-                <a:latin typeface="Grandview Display" panose="020B0502040204020203" pitchFamily="34" charset="0"/>
-              </a:rPr>
-              <a:t>Performance monitoring dashboard</a:t>
-            </a:r>
-          </a:p>
-          <a:p>
-            <a:pPr lvl="1">
-              <a:lnSpc>
-                <a:spcPct val="120000"/>
-              </a:lnSpc>
-              <a:spcBef>
-                <a:spcPts val="1001"/>
-              </a:spcBef>
-              <a:buClr>
-                <a:srgbClr val="000000"/>
-              </a:buClr>
-              <a:buSzPct val="75000"/>
-              <a:buFont typeface="Arial"/>
-              <a:buChar char="•"/>
-            </a:pPr>
-            <a:r>
-              <a:rPr lang="en-US" sz="1400" b="0" u="none" strike="noStrike" dirty="0">
-                <a:solidFill>
-                  <a:srgbClr val="000000"/>
-                </a:solidFill>
-                <a:effectLst/>
-                <a:uFillTx/>
-                <a:latin typeface="Grandview Display" panose="020B0502040204020203" pitchFamily="34" charset="0"/>
-              </a:rPr>
-              <a:t>Long</a:t>
-            </a:r>
-            <a:r>
-              <a:rPr lang="en-US" sz="1400" dirty="0">
-                <a:solidFill>
-                  <a:srgbClr val="000000"/>
-                </a:solidFill>
-                <a:latin typeface="Grandview Display" panose="020B0502040204020203" pitchFamily="34" charset="0"/>
-              </a:rPr>
-              <a:t>-term goal – fully automated system</a:t>
-            </a:r>
-            <a:endParaRPr lang="en-US" sz="1400" b="0" u="none" strike="noStrike" dirty="0">
-              <a:solidFill>
-                <a:srgbClr val="000000"/>
-              </a:solidFill>
-              <a:effectLst/>
-              <a:uFillTx/>
-              <a:latin typeface="Grandview Display" panose="020B0502040204020203" pitchFamily="34" charset="0"/>
-            </a:endParaRPr>
-          </a:p>
-        </p:txBody>
-      </p:sp>
-    </p:spTree>
-    <p:extLst>
-      <p:ext uri="{BB962C8B-B14F-4D97-AF65-F5344CB8AC3E}">
-        <p14:creationId xmlns:p14="http://schemas.microsoft.com/office/powerpoint/2010/main" val="4178398773"/>
-      </p:ext>
-    </p:extLst>
-  </p:cSld>
-  <p:clrMapOvr>
-    <a:masterClrMapping/>
-  </p:clrMapOvr>
-</p:sld>
-</file>
-
-<file path=ppt/slides/slide18.xml><?xml version="1.0" encoding="utf-8"?>
-<p:sld xmlns:a="http://schemas.openxmlformats.org/drawingml/2006/main" xmlns:r="http://schemas.openxmlformats.org/officeDocument/2006/relationships" xmlns:p="http://schemas.openxmlformats.org/presentationml/2006/main">
-  <p:cSld>
-    <p:spTree>
-      <p:nvGrpSpPr>
-        <p:cNvPr id="1" name=""/>
-        <p:cNvGrpSpPr/>
-        <p:nvPr/>
-      </p:nvGrpSpPr>
-      <p:grpSpPr>
-        <a:xfrm>
-          <a:off x="0" y="0"/>
-          <a:ext cx="0" cy="0"/>
-          <a:chOff x="0" y="0"/>
-          <a:chExt cx="0" cy="0"/>
-        </a:xfrm>
-      </p:grpSpPr>
-      <p:sp>
-        <p:nvSpPr>
-          <p:cNvPr id="101" name="PlaceHolder 1"/>
-          <p:cNvSpPr>
-            <a:spLocks noGrp="1"/>
-          </p:cNvSpPr>
-          <p:nvPr>
-            <p:ph type="title"/>
-          </p:nvPr>
-        </p:nvSpPr>
-        <p:spPr>
-          <a:xfrm>
-            <a:off x="651960" y="647640"/>
-            <a:ext cx="10624320" cy="1145880"/>
-          </a:xfrm>
-          <a:prstGeom prst="rect">
-            <a:avLst/>
-          </a:prstGeom>
-          <a:noFill/>
-          <a:ln w="0">
-            <a:noFill/>
-          </a:ln>
-        </p:spPr>
-        <p:txBody>
-          <a:bodyPr lIns="91440" tIns="45720" rIns="91440" bIns="45720" anchor="b">
-            <a:noAutofit/>
-          </a:bodyPr>
-          <a:lstStyle/>
-          <a:p>
-            <a:pPr indent="0" defTabSz="914400">
-              <a:lnSpc>
-                <a:spcPct val="120000"/>
-              </a:lnSpc>
-              <a:buNone/>
-              <a:tabLst>
-                <a:tab pos="0" algn="l"/>
-              </a:tabLst>
-            </a:pPr>
-            <a:r>
-              <a:rPr lang="en-IL" sz="3600" b="0" u="none" strike="noStrike" cap="all" spc="300">
-                <a:solidFill>
-                  <a:srgbClr val="FFFFFF"/>
-                </a:solidFill>
-                <a:effectLst/>
-                <a:highlight>
-                  <a:srgbClr val="000000"/>
-                </a:highlight>
-                <a:uFillTx/>
-                <a:latin typeface="Grandview"/>
-              </a:rPr>
-              <a:t>Questions?</a:t>
-            </a:r>
-            <a:endParaRPr lang="en-US" sz="3600" b="0" u="none" strike="noStrike">
               <a:solidFill>
                 <a:srgbClr val="000000"/>
               </a:solidFill>
@@ -33206,6 +33094,558 @@
               <a:t>Goal: Develop a ML model to identify arbitrage opportunities in real-time between cryptocurrency exchanges</a:t>
             </a:r>
             <a:endParaRPr lang="en-US" sz="2000" b="0" u="none" strike="noStrike" dirty="0">
+              <a:solidFill>
+                <a:srgbClr val="000000"/>
+              </a:solidFill>
+              <a:effectLst/>
+              <a:uFillTx/>
+              <a:latin typeface="Arial"/>
+            </a:endParaRPr>
+          </a:p>
+        </p:txBody>
+      </p:sp>
+    </p:spTree>
+  </p:cSld>
+  <p:clrMapOvr>
+    <a:masterClrMapping/>
+  </p:clrMapOvr>
+</p:sld>
+</file>
+
+<file path=ppt/slides/slide20.xml><?xml version="1.0" encoding="utf-8"?>
+<p:sld xmlns:a="http://schemas.openxmlformats.org/drawingml/2006/main" xmlns:r="http://schemas.openxmlformats.org/officeDocument/2006/relationships" xmlns:p="http://schemas.openxmlformats.org/presentationml/2006/main" show="0">
+  <p:cSld>
+    <p:spTree>
+      <p:nvGrpSpPr>
+        <p:cNvPr id="1" name="">
+          <a:extLst>
+            <a:ext uri="{FF2B5EF4-FFF2-40B4-BE49-F238E27FC236}">
+              <a16:creationId xmlns:a16="http://schemas.microsoft.com/office/drawing/2014/main" id="{B07263C3-0F5C-72E8-AF2D-1D13EF316DBA}"/>
+            </a:ext>
+          </a:extLst>
+        </p:cNvPr>
+        <p:cNvGrpSpPr/>
+        <p:nvPr/>
+      </p:nvGrpSpPr>
+      <p:grpSpPr>
+        <a:xfrm>
+          <a:off x="0" y="0"/>
+          <a:ext cx="0" cy="0"/>
+          <a:chOff x="0" y="0"/>
+          <a:chExt cx="0" cy="0"/>
+        </a:xfrm>
+      </p:grpSpPr>
+      <p:sp>
+        <p:nvSpPr>
+          <p:cNvPr id="77" name="PlaceHolder 1">
+            <a:extLst>
+              <a:ext uri="{FF2B5EF4-FFF2-40B4-BE49-F238E27FC236}">
+                <a16:creationId xmlns:a16="http://schemas.microsoft.com/office/drawing/2014/main" id="{E6CF6C9D-3C19-1AC9-FA18-B2E76560BC4B}"/>
+              </a:ext>
+            </a:extLst>
+          </p:cNvPr>
+          <p:cNvSpPr>
+            <a:spLocks noGrp="1"/>
+          </p:cNvSpPr>
+          <p:nvPr>
+            <p:ph type="title"/>
+          </p:nvPr>
+        </p:nvSpPr>
+        <p:spPr>
+          <a:prstGeom prst="rect">
+            <a:avLst/>
+          </a:prstGeom>
+          <a:noFill/>
+          <a:ln w="0">
+            <a:noFill/>
+          </a:ln>
+        </p:spPr>
+        <p:txBody>
+          <a:bodyPr lIns="91440" tIns="45720" rIns="91440" bIns="45720" anchor="b">
+            <a:noAutofit/>
+          </a:bodyPr>
+          <a:lstStyle/>
+          <a:p>
+            <a:pPr indent="0" defTabSz="914400">
+              <a:lnSpc>
+                <a:spcPct val="120000"/>
+              </a:lnSpc>
+              <a:buNone/>
+              <a:tabLst>
+                <a:tab pos="0" algn="l"/>
+              </a:tabLst>
+            </a:pPr>
+            <a:r>
+              <a:rPr lang="en-IL" sz="3600" b="0" u="none" strike="noStrike" cap="all" spc="300" dirty="0">
+                <a:solidFill>
+                  <a:srgbClr val="FFFFFF"/>
+                </a:solidFill>
+                <a:effectLst/>
+                <a:highlight>
+                  <a:srgbClr val="000000"/>
+                </a:highlight>
+                <a:uFillTx/>
+                <a:latin typeface="Grandview"/>
+              </a:rPr>
+              <a:t>Next steps (FOR FINAL PRESENTATION)</a:t>
+            </a:r>
+            <a:endParaRPr lang="en-US" sz="3600" b="0" u="none" strike="noStrike" dirty="0">
+              <a:solidFill>
+                <a:srgbClr val="000000"/>
+              </a:solidFill>
+              <a:effectLst/>
+              <a:uFillTx/>
+              <a:latin typeface="Arial"/>
+            </a:endParaRPr>
+          </a:p>
+        </p:txBody>
+      </p:sp>
+      <p:sp>
+        <p:nvSpPr>
+          <p:cNvPr id="78" name="PlaceHolder 2">
+            <a:extLst>
+              <a:ext uri="{FF2B5EF4-FFF2-40B4-BE49-F238E27FC236}">
+                <a16:creationId xmlns:a16="http://schemas.microsoft.com/office/drawing/2014/main" id="{3CA7A471-D2B0-6DEC-6752-72F1DE005FC9}"/>
+              </a:ext>
+            </a:extLst>
+          </p:cNvPr>
+          <p:cNvSpPr>
+            <a:spLocks noGrp="1"/>
+          </p:cNvSpPr>
+          <p:nvPr>
+            <p:ph type="body"/>
+          </p:nvPr>
+        </p:nvSpPr>
+        <p:spPr>
+          <a:prstGeom prst="rect">
+            <a:avLst/>
+          </a:prstGeom>
+          <a:noFill/>
+          <a:ln w="0">
+            <a:noFill/>
+          </a:ln>
+        </p:spPr>
+        <p:txBody>
+          <a:bodyPr lIns="91440" tIns="45720" rIns="91440" bIns="45720" anchor="t">
+            <a:noAutofit/>
+          </a:bodyPr>
+          <a:lstStyle/>
+          <a:p>
+            <a:pPr marL="228600" indent="-228600" defTabSz="914400">
+              <a:lnSpc>
+                <a:spcPct val="120000"/>
+              </a:lnSpc>
+              <a:spcBef>
+                <a:spcPts val="1001"/>
+              </a:spcBef>
+              <a:buClr>
+                <a:srgbClr val="000000"/>
+              </a:buClr>
+              <a:buSzPct val="75000"/>
+              <a:buFont typeface="Arial"/>
+              <a:buChar char="•"/>
+            </a:pPr>
+            <a:r>
+              <a:rPr lang="en-US" sz="1800" dirty="0">
+                <a:solidFill>
+                  <a:schemeClr val="dk1"/>
+                </a:solidFill>
+                <a:latin typeface="Grandview Display" panose="020B0502040204020203" pitchFamily="34" charset="0"/>
+              </a:rPr>
+              <a:t>Immediate</a:t>
+            </a:r>
+          </a:p>
+          <a:p>
+            <a:pPr lvl="1">
+              <a:lnSpc>
+                <a:spcPct val="120000"/>
+              </a:lnSpc>
+              <a:spcBef>
+                <a:spcPts val="1001"/>
+              </a:spcBef>
+              <a:buClr>
+                <a:srgbClr val="000000"/>
+              </a:buClr>
+              <a:buSzPct val="75000"/>
+              <a:buFont typeface="Arial"/>
+              <a:buChar char="•"/>
+            </a:pPr>
+            <a:r>
+              <a:rPr lang="en-US" sz="1400" b="0" u="none" strike="noStrike" dirty="0">
+                <a:solidFill>
+                  <a:srgbClr val="000000"/>
+                </a:solidFill>
+                <a:effectLst/>
+                <a:uFillTx/>
+                <a:latin typeface="Grandview Display" panose="020B0502040204020203" pitchFamily="34" charset="0"/>
+              </a:rPr>
+              <a:t>Collect more historical data (weeks/months)</a:t>
+            </a:r>
+          </a:p>
+          <a:p>
+            <a:pPr lvl="1">
+              <a:lnSpc>
+                <a:spcPct val="120000"/>
+              </a:lnSpc>
+              <a:spcBef>
+                <a:spcPts val="1001"/>
+              </a:spcBef>
+              <a:buClr>
+                <a:srgbClr val="000000"/>
+              </a:buClr>
+              <a:buSzPct val="75000"/>
+              <a:buFont typeface="Arial"/>
+              <a:buChar char="•"/>
+            </a:pPr>
+            <a:r>
+              <a:rPr lang="en-US" sz="1400" b="0" u="none" strike="noStrike" dirty="0">
+                <a:solidFill>
+                  <a:srgbClr val="000000"/>
+                </a:solidFill>
+                <a:effectLst/>
+                <a:uFillTx/>
+                <a:latin typeface="Grandview Display" panose="020B0502040204020203" pitchFamily="34" charset="0"/>
+              </a:rPr>
+              <a:t>Implement basic ML model</a:t>
+            </a:r>
+          </a:p>
+          <a:p>
+            <a:pPr lvl="1">
+              <a:lnSpc>
+                <a:spcPct val="120000"/>
+              </a:lnSpc>
+              <a:spcBef>
+                <a:spcPts val="1001"/>
+              </a:spcBef>
+              <a:buClr>
+                <a:srgbClr val="000000"/>
+              </a:buClr>
+              <a:buSzPct val="75000"/>
+              <a:buFont typeface="Arial"/>
+              <a:buChar char="•"/>
+            </a:pPr>
+            <a:r>
+              <a:rPr lang="en-US" sz="1400" dirty="0">
+                <a:solidFill>
+                  <a:srgbClr val="000000"/>
+                </a:solidFill>
+                <a:latin typeface="Grandview Display" panose="020B0502040204020203" pitchFamily="34" charset="0"/>
+              </a:rPr>
+              <a:t>Back test strategies</a:t>
+            </a:r>
+          </a:p>
+          <a:p>
+            <a:pPr>
+              <a:lnSpc>
+                <a:spcPct val="120000"/>
+              </a:lnSpc>
+              <a:spcBef>
+                <a:spcPts val="1001"/>
+              </a:spcBef>
+              <a:buClr>
+                <a:srgbClr val="000000"/>
+              </a:buClr>
+              <a:buSzPct val="75000"/>
+              <a:buFont typeface="Arial"/>
+              <a:buChar char="•"/>
+            </a:pPr>
+            <a:r>
+              <a:rPr lang="en-US" sz="1800" b="0" u="none" strike="noStrike" dirty="0">
+                <a:solidFill>
+                  <a:srgbClr val="000000"/>
+                </a:solidFill>
+                <a:effectLst/>
+                <a:uFillTx/>
+                <a:latin typeface="Grandview Display" panose="020B0502040204020203" pitchFamily="34" charset="0"/>
+              </a:rPr>
+              <a:t>Future Development (product?)</a:t>
+            </a:r>
+          </a:p>
+          <a:p>
+            <a:pPr lvl="1">
+              <a:lnSpc>
+                <a:spcPct val="120000"/>
+              </a:lnSpc>
+              <a:spcBef>
+                <a:spcPts val="1001"/>
+              </a:spcBef>
+              <a:buClr>
+                <a:srgbClr val="000000"/>
+              </a:buClr>
+              <a:buSzPct val="75000"/>
+              <a:buFont typeface="Arial"/>
+              <a:buChar char="•"/>
+            </a:pPr>
+            <a:r>
+              <a:rPr lang="en-US" sz="1400" dirty="0">
+                <a:solidFill>
+                  <a:srgbClr val="000000"/>
+                </a:solidFill>
+                <a:latin typeface="Grandview Display" panose="020B0502040204020203" pitchFamily="34" charset="0"/>
+              </a:rPr>
+              <a:t>Real-time data pipeline</a:t>
+            </a:r>
+          </a:p>
+          <a:p>
+            <a:pPr lvl="1">
+              <a:lnSpc>
+                <a:spcPct val="120000"/>
+              </a:lnSpc>
+              <a:spcBef>
+                <a:spcPts val="1001"/>
+              </a:spcBef>
+              <a:buClr>
+                <a:srgbClr val="000000"/>
+              </a:buClr>
+              <a:buSzPct val="75000"/>
+              <a:buFont typeface="Arial"/>
+              <a:buChar char="•"/>
+            </a:pPr>
+            <a:r>
+              <a:rPr lang="en-US" sz="1400" dirty="0">
+                <a:solidFill>
+                  <a:srgbClr val="000000"/>
+                </a:solidFill>
+                <a:latin typeface="Grandview Display" panose="020B0502040204020203" pitchFamily="34" charset="0"/>
+              </a:rPr>
+              <a:t>Live deployment with paper trading</a:t>
+            </a:r>
+          </a:p>
+          <a:p>
+            <a:pPr lvl="1">
+              <a:lnSpc>
+                <a:spcPct val="120000"/>
+              </a:lnSpc>
+              <a:spcBef>
+                <a:spcPts val="1001"/>
+              </a:spcBef>
+              <a:buClr>
+                <a:srgbClr val="000000"/>
+              </a:buClr>
+              <a:buSzPct val="75000"/>
+              <a:buFont typeface="Arial"/>
+              <a:buChar char="•"/>
+            </a:pPr>
+            <a:r>
+              <a:rPr lang="en-US" sz="1400" b="0" u="none" strike="noStrike" dirty="0">
+                <a:solidFill>
+                  <a:srgbClr val="000000"/>
+                </a:solidFill>
+                <a:effectLst/>
+                <a:uFillTx/>
+                <a:latin typeface="Grandview Display" panose="020B0502040204020203" pitchFamily="34" charset="0"/>
+              </a:rPr>
+              <a:t>Automated trading bot</a:t>
+            </a:r>
+          </a:p>
+          <a:p>
+            <a:pPr lvl="1">
+              <a:lnSpc>
+                <a:spcPct val="120000"/>
+              </a:lnSpc>
+              <a:spcBef>
+                <a:spcPts val="1001"/>
+              </a:spcBef>
+              <a:buClr>
+                <a:srgbClr val="000000"/>
+              </a:buClr>
+              <a:buSzPct val="75000"/>
+              <a:buFont typeface="Arial"/>
+              <a:buChar char="•"/>
+            </a:pPr>
+            <a:r>
+              <a:rPr lang="en-US" sz="1400" b="0" u="none" strike="noStrike" dirty="0">
+                <a:solidFill>
+                  <a:srgbClr val="000000"/>
+                </a:solidFill>
+                <a:effectLst/>
+                <a:uFillTx/>
+                <a:latin typeface="Grandview Display" panose="020B0502040204020203" pitchFamily="34" charset="0"/>
+              </a:rPr>
+              <a:t>Risk management system</a:t>
+            </a:r>
+          </a:p>
+          <a:p>
+            <a:pPr lvl="1">
+              <a:lnSpc>
+                <a:spcPct val="120000"/>
+              </a:lnSpc>
+              <a:spcBef>
+                <a:spcPts val="1001"/>
+              </a:spcBef>
+              <a:buClr>
+                <a:srgbClr val="000000"/>
+              </a:buClr>
+              <a:buSzPct val="75000"/>
+              <a:buFont typeface="Arial"/>
+              <a:buChar char="•"/>
+            </a:pPr>
+            <a:r>
+              <a:rPr lang="en-US" sz="1400" b="0" u="none" strike="noStrike" dirty="0">
+                <a:solidFill>
+                  <a:srgbClr val="000000"/>
+                </a:solidFill>
+                <a:effectLst/>
+                <a:uFillTx/>
+                <a:latin typeface="Grandview Display" panose="020B0502040204020203" pitchFamily="34" charset="0"/>
+              </a:rPr>
+              <a:t>Multi-crypto portfolio optimization</a:t>
+            </a:r>
+          </a:p>
+          <a:p>
+            <a:pPr lvl="1">
+              <a:lnSpc>
+                <a:spcPct val="120000"/>
+              </a:lnSpc>
+              <a:spcBef>
+                <a:spcPts val="1001"/>
+              </a:spcBef>
+              <a:buClr>
+                <a:srgbClr val="000000"/>
+              </a:buClr>
+              <a:buSzPct val="75000"/>
+              <a:buFont typeface="Arial"/>
+              <a:buChar char="•"/>
+            </a:pPr>
+            <a:r>
+              <a:rPr lang="en-US" sz="1400" dirty="0">
+                <a:solidFill>
+                  <a:srgbClr val="000000"/>
+                </a:solidFill>
+                <a:latin typeface="Grandview Display" panose="020B0502040204020203" pitchFamily="34" charset="0"/>
+              </a:rPr>
+              <a:t>Performance monitoring dashboard</a:t>
+            </a:r>
+          </a:p>
+          <a:p>
+            <a:pPr lvl="1">
+              <a:lnSpc>
+                <a:spcPct val="120000"/>
+              </a:lnSpc>
+              <a:spcBef>
+                <a:spcPts val="1001"/>
+              </a:spcBef>
+              <a:buClr>
+                <a:srgbClr val="000000"/>
+              </a:buClr>
+              <a:buSzPct val="75000"/>
+              <a:buFont typeface="Arial"/>
+              <a:buChar char="•"/>
+            </a:pPr>
+            <a:r>
+              <a:rPr lang="en-US" sz="1400" b="0" u="none" strike="noStrike" dirty="0">
+                <a:solidFill>
+                  <a:srgbClr val="000000"/>
+                </a:solidFill>
+                <a:effectLst/>
+                <a:uFillTx/>
+                <a:latin typeface="Grandview Display" panose="020B0502040204020203" pitchFamily="34" charset="0"/>
+              </a:rPr>
+              <a:t>Long</a:t>
+            </a:r>
+            <a:r>
+              <a:rPr lang="en-US" sz="1400" dirty="0">
+                <a:solidFill>
+                  <a:srgbClr val="000000"/>
+                </a:solidFill>
+                <a:latin typeface="Grandview Display" panose="020B0502040204020203" pitchFamily="34" charset="0"/>
+              </a:rPr>
+              <a:t>-term goal – fully automated system</a:t>
+            </a:r>
+            <a:endParaRPr lang="en-US" sz="1400" b="0" u="none" strike="noStrike" dirty="0">
+              <a:solidFill>
+                <a:srgbClr val="000000"/>
+              </a:solidFill>
+              <a:effectLst/>
+              <a:uFillTx/>
+              <a:latin typeface="Grandview Display" panose="020B0502040204020203" pitchFamily="34" charset="0"/>
+            </a:endParaRPr>
+          </a:p>
+        </p:txBody>
+      </p:sp>
+    </p:spTree>
+    <p:extLst>
+      <p:ext uri="{BB962C8B-B14F-4D97-AF65-F5344CB8AC3E}">
+        <p14:creationId xmlns:p14="http://schemas.microsoft.com/office/powerpoint/2010/main" val="4178398773"/>
+      </p:ext>
+    </p:extLst>
+  </p:cSld>
+  <p:clrMapOvr>
+    <a:masterClrMapping/>
+  </p:clrMapOvr>
+</p:sld>
+</file>
+
+<file path=ppt/slides/slide21.xml><?xml version="1.0" encoding="utf-8"?>
+<p:sld xmlns:a="http://schemas.openxmlformats.org/drawingml/2006/main" xmlns:r="http://schemas.openxmlformats.org/officeDocument/2006/relationships" xmlns:p="http://schemas.openxmlformats.org/presentationml/2006/main">
+  <p:cSld>
+    <p:spTree>
+      <p:nvGrpSpPr>
+        <p:cNvPr id="1" name=""/>
+        <p:cNvGrpSpPr/>
+        <p:nvPr/>
+      </p:nvGrpSpPr>
+      <p:grpSpPr>
+        <a:xfrm>
+          <a:off x="0" y="0"/>
+          <a:ext cx="0" cy="0"/>
+          <a:chOff x="0" y="0"/>
+          <a:chExt cx="0" cy="0"/>
+        </a:xfrm>
+      </p:grpSpPr>
+      <p:sp>
+        <p:nvSpPr>
+          <p:cNvPr id="101" name="PlaceHolder 1"/>
+          <p:cNvSpPr>
+            <a:spLocks noGrp="1"/>
+          </p:cNvSpPr>
+          <p:nvPr>
+            <p:ph type="title"/>
+          </p:nvPr>
+        </p:nvSpPr>
+        <p:spPr>
+          <a:xfrm>
+            <a:off x="651960" y="647640"/>
+            <a:ext cx="10624320" cy="1145880"/>
+          </a:xfrm>
+          <a:prstGeom prst="rect">
+            <a:avLst/>
+          </a:prstGeom>
+          <a:noFill/>
+          <a:ln w="0">
+            <a:noFill/>
+          </a:ln>
+        </p:spPr>
+        <p:txBody>
+          <a:bodyPr lIns="91440" tIns="45720" rIns="91440" bIns="45720" anchor="b">
+            <a:noAutofit/>
+          </a:bodyPr>
+          <a:lstStyle/>
+          <a:p>
+            <a:pPr indent="0" defTabSz="914400">
+              <a:lnSpc>
+                <a:spcPct val="120000"/>
+              </a:lnSpc>
+              <a:buNone/>
+              <a:tabLst>
+                <a:tab pos="0" algn="l"/>
+              </a:tabLst>
+            </a:pPr>
+            <a:r>
+              <a:rPr lang="en-IL" sz="3600" b="0" u="none" strike="noStrike" cap="all" spc="300">
+                <a:solidFill>
+                  <a:srgbClr val="FFFFFF"/>
+                </a:solidFill>
+                <a:effectLst/>
+                <a:highlight>
+                  <a:srgbClr val="000000"/>
+                </a:highlight>
+                <a:uFillTx/>
+                <a:latin typeface="Grandview"/>
+              </a:rPr>
+              <a:t>Questions?</a:t>
+            </a:r>
+            <a:endParaRPr lang="en-US" sz="3600" b="0" u="none" strike="noStrike">
               <a:solidFill>
                 <a:srgbClr val="000000"/>
               </a:solidFill>
@@ -33492,6 +33932,107 @@
   <p:cSld>
     <p:spTree>
       <p:nvGrpSpPr>
+        <p:cNvPr id="1" name="">
+          <a:extLst>
+            <a:ext uri="{FF2B5EF4-FFF2-40B4-BE49-F238E27FC236}">
+              <a16:creationId xmlns:a16="http://schemas.microsoft.com/office/drawing/2014/main" id="{8EA79CE5-3AEB-0F85-3456-3F55AA98C9AD}"/>
+            </a:ext>
+          </a:extLst>
+        </p:cNvPr>
+        <p:cNvGrpSpPr/>
+        <p:nvPr/>
+      </p:nvGrpSpPr>
+      <p:grpSpPr>
+        <a:xfrm>
+          <a:off x="0" y="0"/>
+          <a:ext cx="0" cy="0"/>
+          <a:chOff x="0" y="0"/>
+          <a:chExt cx="0" cy="0"/>
+        </a:xfrm>
+      </p:grpSpPr>
+      <p:sp>
+        <p:nvSpPr>
+          <p:cNvPr id="70" name="PlaceHolder 1">
+            <a:extLst>
+              <a:ext uri="{FF2B5EF4-FFF2-40B4-BE49-F238E27FC236}">
+                <a16:creationId xmlns:a16="http://schemas.microsoft.com/office/drawing/2014/main" id="{FD809947-A02A-B127-6D05-8560518A218D}"/>
+              </a:ext>
+            </a:extLst>
+          </p:cNvPr>
+          <p:cNvSpPr>
+            <a:spLocks noGrp="1"/>
+          </p:cNvSpPr>
+          <p:nvPr>
+            <p:ph type="title"/>
+          </p:nvPr>
+        </p:nvSpPr>
+        <p:spPr>
+          <a:prstGeom prst="rect">
+            <a:avLst/>
+          </a:prstGeom>
+          <a:noFill/>
+          <a:ln w="0">
+            <a:noFill/>
+          </a:ln>
+        </p:spPr>
+        <p:txBody>
+          <a:bodyPr lIns="91440" tIns="45720" rIns="91440" bIns="45720" anchor="b">
+            <a:noAutofit/>
+          </a:bodyPr>
+          <a:lstStyle/>
+          <a:p>
+            <a:pPr indent="0" defTabSz="914400">
+              <a:lnSpc>
+                <a:spcPct val="120000"/>
+              </a:lnSpc>
+              <a:buNone/>
+              <a:tabLst>
+                <a:tab pos="0" algn="l"/>
+              </a:tabLst>
+            </a:pPr>
+            <a:r>
+              <a:rPr lang="en-IL" sz="3600" b="0" u="none" strike="noStrike" cap="all" spc="300" dirty="0">
+                <a:solidFill>
+                  <a:srgbClr val="FFFFFF"/>
+                </a:solidFill>
+                <a:effectLst/>
+                <a:highlight>
+                  <a:srgbClr val="000000"/>
+                </a:highlight>
+                <a:uFillTx/>
+                <a:latin typeface="Grandview"/>
+              </a:rPr>
+              <a:t>SEGMENT 1: RAW DATA COLLECTION</a:t>
+            </a:r>
+            <a:endParaRPr lang="en-US" sz="3600" b="0" u="none" strike="noStrike" dirty="0">
+              <a:solidFill>
+                <a:srgbClr val="000000"/>
+              </a:solidFill>
+              <a:effectLst/>
+              <a:uFillTx/>
+              <a:latin typeface="Arial"/>
+            </a:endParaRPr>
+          </a:p>
+        </p:txBody>
+      </p:sp>
+    </p:spTree>
+    <p:extLst>
+      <p:ext uri="{BB962C8B-B14F-4D97-AF65-F5344CB8AC3E}">
+        <p14:creationId xmlns:p14="http://schemas.microsoft.com/office/powerpoint/2010/main" val="4105241702"/>
+      </p:ext>
+    </p:extLst>
+  </p:cSld>
+  <p:clrMapOvr>
+    <a:masterClrMapping/>
+  </p:clrMapOvr>
+</p:sld>
+</file>
+
+<file path=ppt/slides/slide6.xml><?xml version="1.0" encoding="utf-8"?>
+<p:sld xmlns:a="http://schemas.openxmlformats.org/drawingml/2006/main" xmlns:r="http://schemas.openxmlformats.org/officeDocument/2006/relationships" xmlns:p="http://schemas.openxmlformats.org/presentationml/2006/main">
+  <p:cSld>
+    <p:spTree>
+      <p:nvGrpSpPr>
         <p:cNvPr id="1" name=""/>
         <p:cNvGrpSpPr/>
         <p:nvPr/>
@@ -33948,7 +34489,7 @@
 </p:sld>
 </file>
 
-<file path=ppt/slides/slide6.xml><?xml version="1.0" encoding="utf-8"?>
+<file path=ppt/slides/slide7.xml><?xml version="1.0" encoding="utf-8"?>
 <p:sld xmlns:a="http://schemas.openxmlformats.org/drawingml/2006/main" xmlns:r="http://schemas.openxmlformats.org/officeDocument/2006/relationships" xmlns:p="http://schemas.openxmlformats.org/presentationml/2006/main">
   <p:cSld>
     <p:spTree>
@@ -34139,7 +34680,27 @@
                 <a:uFillTx/>
                 <a:latin typeface="Grandview Display"/>
               </a:rPr>
-              <a:t> across exchanges (convert to UTC)</a:t>
+              <a:t> across exchanges (convert</a:t>
+            </a:r>
+            <a:r>
+              <a:rPr lang="en-US" sz="1600" b="1" dirty="0">
+                <a:solidFill>
+                  <a:schemeClr val="dk1"/>
+                </a:solidFill>
+                <a:latin typeface="Grandview Display"/>
+              </a:rPr>
+              <a:t>ed</a:t>
+            </a:r>
+            <a:r>
+              <a:rPr lang="en-US" sz="1600" b="1" u="none" strike="noStrike" dirty="0">
+                <a:solidFill>
+                  <a:schemeClr val="dk1"/>
+                </a:solidFill>
+                <a:effectLst/>
+                <a:uFillTx/>
+                <a:latin typeface="Grandview Display"/>
+              </a:rPr>
+              <a:t> to UTC)</a:t>
             </a:r>
           </a:p>
           <a:p>
@@ -34168,65 +34729,6 @@
               </a:rPr>
               <a:t>Structured CSV format</a:t>
             </a:r>
-            <a:endParaRPr lang="he-IL" sz="1600" b="1" u="none" strike="noStrike" dirty="0">
-              <a:solidFill>
-                <a:schemeClr val="dk1"/>
-              </a:solidFill>
-              <a:effectLst/>
-              <a:uFillTx/>
-              <a:latin typeface="Grandview Display"/>
-            </a:endParaRPr>
-          </a:p>
-          <a:p>
-            <a:pPr lvl="1">
-              <a:lnSpc>
-                <a:spcPct val="120000"/>
-              </a:lnSpc>
-              <a:spcBef>
-                <a:spcPts val="1001"/>
-              </a:spcBef>
-              <a:buClr>
-                <a:srgbClr val="000000"/>
-              </a:buClr>
-              <a:buSzPct val="75000"/>
-              <a:buFont typeface="Arial"/>
-              <a:buChar char="•"/>
-            </a:pPr>
-            <a:r>
-              <a:rPr lang="en-US" sz="1600" b="1" u="none" strike="noStrike" dirty="0">
-                <a:solidFill>
-                  <a:srgbClr val="FF0000"/>
-                </a:solidFill>
-                <a:effectLst/>
-                <a:uFillTx/>
-                <a:latin typeface="Grandview Display"/>
-              </a:rPr>
-              <a:t>MORE INFO ABOUT THE API</a:t>
-            </a:r>
-          </a:p>
-          <a:p>
-            <a:pPr lvl="1">
-              <a:lnSpc>
-                <a:spcPct val="120000"/>
-              </a:lnSpc>
-              <a:spcBef>
-                <a:spcPts val="1001"/>
-              </a:spcBef>
-              <a:buClr>
-                <a:srgbClr val="000000"/>
-              </a:buClr>
-              <a:buSzPct val="75000"/>
-              <a:buFont typeface="Arial"/>
-              <a:buChar char="•"/>
-            </a:pPr>
-            <a:endParaRPr lang="en-US" sz="1600" b="1" u="none" strike="noStrike" dirty="0">
-              <a:solidFill>
-                <a:schemeClr val="dk1"/>
-              </a:solidFill>
-              <a:effectLst/>
-              <a:uFillTx/>
-              <a:latin typeface="Grandview Display"/>
-            </a:endParaRPr>
           </a:p>
           <a:p>
             <a:pPr lvl="1">
@@ -34320,7 +34822,7 @@
         </p:blipFill>
         <p:spPr>
           <a:xfrm>
-            <a:off x="445907" y="4019040"/>
+            <a:off x="445907" y="3660225"/>
             <a:ext cx="11031746" cy="2402289"/>
           </a:xfrm>
           <a:prstGeom prst="rect">
@@ -34351,7 +34853,7 @@
 </p:sld>
 </file>
 
-<file path=ppt/slides/slide7.xml><?xml version="1.0" encoding="utf-8"?>
+<file path=ppt/slides/slide8.xml><?xml version="1.0" encoding="utf-8"?>
 <p:sld xmlns:a="http://schemas.openxmlformats.org/drawingml/2006/main" xmlns:r="http://schemas.openxmlformats.org/officeDocument/2006/relationships" xmlns:p="http://schemas.openxmlformats.org/presentationml/2006/main">
   <p:cSld>
     <p:spTree>
@@ -34755,52 +35257,7 @@
                 </a:solidFill>
                 <a:latin typeface="Grandview Display"/>
               </a:rPr>
-              <a:t> handling – if volume 0, neglect all row </a:t>
-            </a:r>
-            <a:r>
-              <a:rPr lang="en-US" sz="1400" b="1" dirty="0" err="1">
-                <a:solidFill>
-                  <a:schemeClr val="dk1"/>
-                </a:solidFill>
-                <a:latin typeface="Grandview Display"/>
-              </a:rPr>
-              <a:t>EX:row</a:t>
-            </a:r>
-            <a:r>
-              <a:rPr lang="en-US" sz="1400" b="1" dirty="0">
-                <a:solidFill>
-                  <a:schemeClr val="dk1"/>
-                </a:solidFill>
-                <a:latin typeface="Grandview Display"/>
-              </a:rPr>
-              <a:t>)</a:t>
-            </a:r>
-          </a:p>
-          <a:p>
-            <a:pPr lvl="1">
-              <a:lnSpc>
-                <a:spcPct val="120000"/>
-              </a:lnSpc>
-              <a:spcBef>
-                <a:spcPts val="1001"/>
-              </a:spcBef>
-              <a:buClr>
-                <a:srgbClr val="000000"/>
-              </a:buClr>
-              <a:buSzPct val="75000"/>
-              <a:buFont typeface="Arial"/>
-              <a:buChar char="•"/>
-            </a:pPr>
-            <a:r>
-              <a:rPr lang="en-US" sz="1400" b="1" u="none" strike="noStrike" dirty="0">
-                <a:solidFill>
-                  <a:schemeClr val="dk1"/>
-                </a:solidFill>
-                <a:effectLst/>
-                <a:uFillTx/>
-                <a:latin typeface="Grandview Display"/>
-              </a:rPr>
-              <a:t>Outliers and erroneous prices</a:t>
+              <a:t> handling \ volume 0)</a:t>
             </a:r>
           </a:p>
           <a:p>
@@ -34895,7 +35352,7 @@
 </p:sld>
 </file>
 
-<file path=ppt/slides/slide8.xml><?xml version="1.0" encoding="utf-8"?>
+<file path=ppt/slides/slide9.xml><?xml version="1.0" encoding="utf-8"?>
 <p:sld xmlns:a="http://schemas.openxmlformats.org/drawingml/2006/main" xmlns:r="http://schemas.openxmlformats.org/officeDocument/2006/relationships" xmlns:p="http://schemas.openxmlformats.org/presentationml/2006/main">
   <p:cSld>
     <p:spTree>
@@ -34971,290 +35428,7 @@
           </a:p>
         </p:txBody>
       </p:sp>
-      <p:sp>
-        <p:nvSpPr>
-          <p:cNvPr id="8" name="Text Placeholder 7">
-            <a:extLst>
-              <a:ext uri="{FF2B5EF4-FFF2-40B4-BE49-F238E27FC236}">
-                <a16:creationId xmlns:a16="http://schemas.microsoft.com/office/drawing/2014/main" id="{8BC18BA3-8B7B-7AF3-7D19-C5BBED5DF84F}"/>
-              </a:ext>
-            </a:extLst>
-          </p:cNvPr>
-          <p:cNvSpPr>
-            <a:spLocks noGrp="1"/>
-          </p:cNvSpPr>
-          <p:nvPr>
-            <p:ph type="body"/>
-          </p:nvPr>
-        </p:nvSpPr>
-        <p:spPr/>
-        <p:txBody>
-          <a:bodyPr/>
-          <a:lstStyle/>
-          <a:p>
-            <a:r>
-              <a:rPr lang="en-US" sz="1600" i="1" dirty="0"/>
-              <a:t>“From Raw Data to Predictive Features”</a:t>
-            </a:r>
-          </a:p>
-          <a:p>
-            <a:r>
-              <a:rPr lang="en-US" sz="1600" i="1" dirty="0"/>
-              <a:t>Raw Data limitations</a:t>
-            </a:r>
-          </a:p>
-          <a:p>
-            <a:pPr lvl="1"/>
-            <a:r>
-              <a:rPr lang="en-US" sz="1600" i="1" dirty="0"/>
-              <a:t>Only shows what happened</a:t>
-            </a:r>
-          </a:p>
-          <a:p>
-            <a:pPr lvl="1"/>
-            <a:r>
-              <a:rPr lang="en-US" sz="1600" i="1" dirty="0"/>
-              <a:t>Doesn’t show relationships between exchanges</a:t>
-            </a:r>
-          </a:p>
-          <a:p>
-            <a:pPr lvl="1"/>
-            <a:r>
-              <a:rPr lang="en-US" sz="1600" i="1" dirty="0"/>
-              <a:t>Misses temporal patterns and trends</a:t>
-            </a:r>
-          </a:p>
-          <a:p>
-            <a:r>
-              <a:rPr lang="en-US" sz="1600" i="1" dirty="0"/>
-              <a:t>Feature engineering reveals much more</a:t>
-            </a:r>
-          </a:p>
-          <a:p>
-            <a:pPr lvl="1"/>
-            <a:r>
-              <a:rPr lang="en-US" sz="1600" b="1" i="1" dirty="0"/>
-              <a:t>Arbitrage opportunists</a:t>
-            </a:r>
-            <a:r>
-              <a:rPr lang="en-US" sz="1600" i="1" dirty="0"/>
-              <a:t> – price differences across exchanges</a:t>
-            </a:r>
-          </a:p>
-          <a:p>
-            <a:pPr lvl="1"/>
-            <a:r>
-              <a:rPr lang="en-US" sz="1600" b="1" i="1" dirty="0"/>
-              <a:t>Liquidity constraints </a:t>
-            </a:r>
-            <a:r>
-              <a:rPr lang="en-US" sz="1600" i="1" dirty="0"/>
-              <a:t>– Can we actually execute?</a:t>
-            </a:r>
-          </a:p>
-          <a:p>
-            <a:pPr lvl="1"/>
-            <a:r>
-              <a:rPr lang="en-US" sz="1600" b="1" i="1" dirty="0"/>
-              <a:t>Market patterns </a:t>
-            </a:r>
-            <a:r>
-              <a:rPr lang="en-US" sz="1600" i="1" dirty="0"/>
-              <a:t>– When and where opportunities occur</a:t>
-            </a:r>
-          </a:p>
-          <a:p>
-            <a:pPr lvl="1"/>
-            <a:r>
-              <a:rPr lang="en-US" sz="1600" b="1" i="1" dirty="0"/>
-              <a:t>Risk indicators </a:t>
-            </a:r>
-            <a:r>
-              <a:rPr lang="en-US" sz="1600" i="1" dirty="0"/>
-              <a:t>– How volatile is the opportunity?</a:t>
-            </a:r>
-          </a:p>
-          <a:p>
-            <a:pPr lvl="1"/>
-            <a:r>
-              <a:rPr lang="en-US" sz="1600" b="1" i="1" dirty="0"/>
-              <a:t>Predictive signals </a:t>
-            </a:r>
-            <a:r>
-              <a:rPr lang="en-US" sz="1600" i="1" dirty="0"/>
-              <a:t>– what might happen next?</a:t>
-            </a:r>
-          </a:p>
-          <a:p>
-            <a:r>
-              <a:rPr lang="en-US" sz="1600" dirty="0"/>
-              <a:t>Raw Data (~30 columns) -&gt;</a:t>
-            </a:r>
-            <a:r>
-              <a:rPr lang="en-US" sz="1600" dirty="0">
-                <a:latin typeface="Grandview Display" panose="020B0502040204020203" pitchFamily="34" charset="0"/>
-              </a:rPr>
-              <a:t> 4 </a:t>
-            </a:r>
-            <a:r>
-              <a:rPr lang="en-US" sz="1600" dirty="0"/>
-              <a:t>layers F.E Pyramid -&gt; Featured Data (~153 columns)</a:t>
-            </a:r>
-          </a:p>
-          <a:p>
-            <a:r>
-              <a:rPr lang="en-US" sz="1600" dirty="0"/>
-              <a:t>Features added to featured_data CSVs (float, string, enum)</a:t>
-            </a:r>
-          </a:p>
-          <a:p>
-            <a:r>
-              <a:rPr lang="en-US" sz="1600" dirty="0"/>
-              <a:t>Stand-alone args plotter (WIP)</a:t>
-            </a:r>
-          </a:p>
-          <a:p>
-            <a:endParaRPr lang="en-US" sz="1600" dirty="0"/>
-          </a:p>
-        </p:txBody>
-      </p:sp>
     </p:spTree>
-  </p:cSld>
-  <p:clrMapOvr>
-    <a:masterClrMapping/>
-  </p:clrMapOvr>
-</p:sld>
-</file>
-
-<file path=ppt/slides/slide9.xml><?xml version="1.0" encoding="utf-8"?>
-<p:sld xmlns:a="http://schemas.openxmlformats.org/drawingml/2006/main" xmlns:r="http://schemas.openxmlformats.org/officeDocument/2006/relationships" xmlns:p="http://schemas.openxmlformats.org/presentationml/2006/main">
-  <p:cSld>
-    <p:spTree>
-      <p:nvGrpSpPr>
-        <p:cNvPr id="1" name=""/>
-        <p:cNvGrpSpPr/>
-        <p:nvPr/>
-      </p:nvGrpSpPr>
-      <p:grpSpPr>
-        <a:xfrm>
-          <a:off x="0" y="0"/>
-          <a:ext cx="0" cy="0"/>
-          <a:chOff x="0" y="0"/>
-          <a:chExt cx="0" cy="0"/>
-        </a:xfrm>
-      </p:grpSpPr>
-      <p:sp>
-        <p:nvSpPr>
-          <p:cNvPr id="4" name="Title 3">
-            <a:extLst>
-              <a:ext uri="{FF2B5EF4-FFF2-40B4-BE49-F238E27FC236}">
-                <a16:creationId xmlns:a16="http://schemas.microsoft.com/office/drawing/2014/main" id="{23192FBB-431B-311A-D051-54F5D52AA7B1}"/>
-              </a:ext>
-            </a:extLst>
-          </p:cNvPr>
-          <p:cNvSpPr>
-            <a:spLocks noGrp="1"/>
-          </p:cNvSpPr>
-          <p:nvPr>
-            <p:ph type="title"/>
-          </p:nvPr>
-        </p:nvSpPr>
-        <p:spPr/>
-        <p:txBody>
-          <a:bodyPr/>
-          <a:lstStyle/>
-          <a:p>
-            <a:r>
-              <a:rPr lang="en-IL" sz="3600" cap="all" spc="300" dirty="0">
-                <a:solidFill>
-                  <a:srgbClr val="FFFFFF"/>
-                </a:solidFill>
-                <a:highlight>
-                  <a:srgbClr val="000000"/>
-                </a:highlight>
-                <a:latin typeface="Grandview"/>
-              </a:rPr>
-              <a:t>SEGMENT</a:t>
-            </a:r>
-            <a:r>
-              <a:rPr lang="en-IL" sz="3600" cap="all" spc="300" dirty="0">
-                <a:solidFill>
-                  <a:srgbClr val="FFFFFF"/>
-                </a:solidFill>
-                <a:highlight>
-                  <a:srgbClr val="000000"/>
-                </a:highlight>
-              </a:rPr>
-              <a:t> 2: Feature categories</a:t>
-            </a:r>
-            <a:endParaRPr lang="en-IL" sz="3600" dirty="0">
-              <a:latin typeface="Grandview Display" panose="020B0502040204020203" pitchFamily="34" charset="0"/>
-            </a:endParaRPr>
-          </a:p>
-        </p:txBody>
-      </p:sp>
-      <p:graphicFrame>
-        <p:nvGraphicFramePr>
-          <p:cNvPr id="6" name="Diagram 5">
-            <a:extLst>
-              <a:ext uri="{FF2B5EF4-FFF2-40B4-BE49-F238E27FC236}">
-                <a16:creationId xmlns:a16="http://schemas.microsoft.com/office/drawing/2014/main" id="{19487102-50C8-F232-3895-67CDB5B80081}"/>
-              </a:ext>
-            </a:extLst>
-          </p:cNvPr>
-          <p:cNvGraphicFramePr/>
-          <p:nvPr>
-            <p:extLst>
-              <p:ext uri="{D42A27DB-BD31-4B8C-83A1-F6EECF244321}">
-                <p14:modId xmlns:p14="http://schemas.microsoft.com/office/powerpoint/2010/main" val="2885728409"/>
-              </p:ext>
-            </p:extLst>
-          </p:nvPr>
-        </p:nvGraphicFramePr>
-        <p:xfrm>
-          <a:off x="523433" y="2060294"/>
-          <a:ext cx="5329499" cy="4022745"/>
-        </p:xfrm>
-        <a:graphic>
-          <a:graphicData uri="http://schemas.openxmlformats.org/drawingml/2006/diagram">
-            <dgm:relIds xmlns:dgm="http://schemas.openxmlformats.org/drawingml/2006/diagram" xmlns:r="http://schemas.openxmlformats.org/officeDocument/2006/relationships" r:dm="rId2" r:lo="rId3" r:qs="rId4" r:cs="rId5"/>
-          </a:graphicData>
-        </a:graphic>
-      </p:graphicFrame>
-      <p:graphicFrame>
-        <p:nvGraphicFramePr>
-          <p:cNvPr id="7" name="Diagram 6">
-            <a:extLst>
-              <a:ext uri="{FF2B5EF4-FFF2-40B4-BE49-F238E27FC236}">
-                <a16:creationId xmlns:a16="http://schemas.microsoft.com/office/drawing/2014/main" id="{8034AA49-23B3-0833-A43F-E9E1903113AF}"/>
-              </a:ext>
-            </a:extLst>
-          </p:cNvPr>
-          <p:cNvGraphicFramePr/>
-          <p:nvPr>
-            <p:extLst>
-              <p:ext uri="{D42A27DB-BD31-4B8C-83A1-F6EECF244321}">
-                <p14:modId xmlns:p14="http://schemas.microsoft.com/office/powerpoint/2010/main" val="82030664"/>
-              </p:ext>
-            </p:extLst>
-          </p:nvPr>
-        </p:nvGraphicFramePr>
-        <p:xfrm>
-          <a:off x="6119150" y="2071869"/>
-          <a:ext cx="5329499" cy="4022745"/>
-        </p:xfrm>
-        <a:graphic>
-          <a:graphicData uri="http://schemas.openxmlformats.org/drawingml/2006/diagram">
-            <dgm:relIds xmlns:dgm="http://schemas.openxmlformats.org/drawingml/2006/diagram" xmlns:r="http://schemas.openxmlformats.org/officeDocument/2006/relationships" r:dm="rId7" r:lo="rId8" r:qs="rId9" r:cs="rId10"/>
-          </a:graphicData>
-        </a:graphic>
-      </p:graphicFrame>
-    </p:spTree>
-    <p:extLst>
-      <p:ext uri="{BB962C8B-B14F-4D97-AF65-F5344CB8AC3E}">
-        <p14:creationId xmlns:p14="http://schemas.microsoft.com/office/powerpoint/2010/main" val="279716472"/>
-      </p:ext>
-    </p:extLst>
   </p:cSld>
   <p:clrMapOvr>
     <a:masterClrMapping/>

--- a/Presentations/Cryto Arbitrage P2.pptx
+++ b/Presentations/Cryto Arbitrage P2.pptx
@@ -28465,7 +28465,19 @@
                 <a:uFillTx/>
                 <a:latin typeface="Grandview"/>
               </a:rPr>
-              <a:t>Data Science Workshop: Crypto Arbitrage system</a:t>
+              <a:t>Data Science Workshop: Crypto Arbitrage o</a:t>
+            </a:r>
+            <a:r>
+              <a:rPr lang="en-IL" cap="all" spc="300" dirty="0">
+                <a:solidFill>
+                  <a:srgbClr val="FFFFFF"/>
+                </a:solidFill>
+                <a:highlight>
+                  <a:srgbClr val="000000"/>
+                </a:highlight>
+                <a:latin typeface="Grandview"/>
+              </a:rPr>
+              <a:t>racle</a:t>
             </a:r>
             <a:endParaRPr lang="en-US" sz="4400" b="0" u="none" strike="noStrike" dirty="0">
               <a:solidFill>
@@ -29978,7 +29990,7 @@
                 <a:effectLst/>
                 <a:latin typeface="Menlo" panose="020B0609030804020204" pitchFamily="49" charset="0"/>
               </a:rPr>
-              <a:t> calculations over time)</a:t>
+              <a:t> calculations)</a:t>
             </a:r>
           </a:p>
           <a:p>
@@ -30948,7 +30960,7 @@
             <a:pPr lvl="2"/>
             <a:r>
               <a:rPr lang="en-US" sz="1600" dirty="0"/>
-              <a:t>Low spreads != executable trades</a:t>
+              <a:t>Low spreads != executable trades (absolute value)</a:t>
             </a:r>
           </a:p>
           <a:p>
@@ -31215,7 +31227,7 @@
             <a:pPr lvl="1"/>
             <a:r>
               <a:rPr lang="en-US" sz="2000" dirty="0"/>
-              <a:t>Temporal features need sufficient history (5,10,30)</a:t>
+              <a:t>Temporal features need sufficient history (5,15,30)</a:t>
             </a:r>
           </a:p>
           <a:p>
@@ -31267,13 +31279,13 @@
           <p:nvPr>
             <p:extLst>
               <p:ext uri="{D42A27DB-BD31-4B8C-83A1-F6EECF244321}">
-                <p14:modId xmlns:p14="http://schemas.microsoft.com/office/powerpoint/2010/main" val="2060643611"/>
+                <p14:modId xmlns:p14="http://schemas.microsoft.com/office/powerpoint/2010/main" val="2937166984"/>
               </p:ext>
             </p:extLst>
           </p:nvPr>
         </p:nvGraphicFramePr>
         <p:xfrm>
-          <a:off x="6956385" y="4118043"/>
+          <a:off x="6956385" y="4372686"/>
           <a:ext cx="5023413" cy="2346960"/>
         </p:xfrm>
         <a:graphic>
@@ -31669,7 +31681,7 @@
         </p:nvSpPr>
         <p:spPr>
           <a:xfrm flipH="1">
-            <a:off x="8293261" y="3803291"/>
+            <a:off x="8258537" y="4019040"/>
             <a:ext cx="2106591" cy="314752"/>
           </a:xfrm>
           <a:prstGeom prst="rect">
@@ -31814,6 +31826,31 @@
               <a:uFillTx/>
               <a:latin typeface="Arial"/>
             </a:endParaRPr>
+          </a:p>
+        </p:txBody>
+      </p:sp>
+      <p:sp>
+        <p:nvSpPr>
+          <p:cNvPr id="2" name="Text Placeholder 1">
+            <a:extLst>
+              <a:ext uri="{FF2B5EF4-FFF2-40B4-BE49-F238E27FC236}">
+                <a16:creationId xmlns:a16="http://schemas.microsoft.com/office/drawing/2014/main" id="{C5BA8240-650A-8E03-F4A6-7AF1667DB460}"/>
+              </a:ext>
+            </a:extLst>
+          </p:cNvPr>
+          <p:cNvSpPr>
+            <a:spLocks noGrp="1"/>
+          </p:cNvSpPr>
+          <p:nvPr>
+            <p:ph type="body"/>
+          </p:nvPr>
+        </p:nvSpPr>
+        <p:spPr/>
+        <p:txBody>
+          <a:bodyPr/>
+          <a:lstStyle/>
+          <a:p>
+            <a:endParaRPr lang="en-IL"/>
           </a:p>
         </p:txBody>
       </p:sp>
@@ -34144,7 +34181,7 @@
               <a:buChar char="•"/>
             </a:pPr>
             <a:r>
-              <a:rPr lang="en-US" sz="2000" b="1" u="none" strike="noStrike" dirty="0">
+              <a:rPr lang="en-US" sz="2000" u="none" strike="noStrike" dirty="0">
                 <a:solidFill>
                   <a:schemeClr val="dk1"/>
                 </a:solidFill>
@@ -34171,7 +34208,7 @@
               <a:buChar char="•"/>
             </a:pPr>
             <a:r>
-              <a:rPr lang="en-US" sz="1600" b="1" dirty="0">
+              <a:rPr lang="en-US" sz="1600" dirty="0">
                 <a:solidFill>
                   <a:schemeClr val="dk1"/>
                 </a:solidFill>
@@ -34179,7 +34216,7 @@
               <a:t>Binance, Coinbase, Kraken, Bitfinex, </a:t>
             </a:r>
             <a:r>
-              <a:rPr lang="en-US" sz="1600" b="1" dirty="0" err="1">
+              <a:rPr lang="en-US" sz="1600" dirty="0" err="1">
                 <a:solidFill>
                   <a:schemeClr val="dk1"/>
                 </a:solidFill>
@@ -34187,14 +34224,14 @@
               <a:t>Gate.io</a:t>
             </a:r>
             <a:r>
-              <a:rPr lang="en-US" sz="1600" b="1" dirty="0">
+              <a:rPr lang="en-US" sz="1600" dirty="0">
                 <a:solidFill>
                   <a:schemeClr val="dk1"/>
                 </a:solidFill>
               </a:rPr>
               <a:t>, MEXC</a:t>
             </a:r>
-            <a:endParaRPr lang="en-US" sz="1600" b="1" u="none" strike="noStrike" dirty="0">
+            <a:endParaRPr lang="en-US" sz="1600" u="none" strike="noStrike" dirty="0">
               <a:solidFill>
                 <a:schemeClr val="dk1"/>
               </a:solidFill>
@@ -34218,7 +34255,7 @@
               <a:buFont typeface="Arial"/>
               <a:buChar char="•"/>
             </a:pPr>
-            <a:endParaRPr lang="en-US" sz="100" b="1" u="none" strike="noStrike" dirty="0">
+            <a:endParaRPr lang="en-US" sz="100" u="none" strike="noStrike" dirty="0">
               <a:solidFill>
                 <a:schemeClr val="dk1"/>
               </a:solidFill>
@@ -34243,7 +34280,7 @@
               <a:buChar char="•"/>
             </a:pPr>
             <a:r>
-              <a:rPr lang="en-US" sz="2000" b="1" u="none" strike="noStrike" dirty="0">
+              <a:rPr lang="en-US" sz="2000" u="none" strike="noStrike" dirty="0">
                 <a:solidFill>
                   <a:schemeClr val="dk1"/>
                 </a:solidFill>
@@ -34254,7 +34291,7 @@
               <a:t>6 Crypto</a:t>
             </a:r>
             <a:r>
-              <a:rPr lang="en-US" sz="2000" b="1" dirty="0">
+              <a:rPr lang="en-US" sz="2000" dirty="0">
                 <a:solidFill>
                   <a:schemeClr val="dk1"/>
                 </a:solidFill>
@@ -34279,7 +34316,7 @@
               <a:buChar char="•"/>
             </a:pPr>
             <a:r>
-              <a:rPr lang="en-US" sz="1600" b="1" u="none" strike="noStrike" dirty="0">
+              <a:rPr lang="en-US" sz="1600" u="none" strike="noStrike" dirty="0">
                 <a:solidFill>
                   <a:schemeClr val="dk1"/>
                 </a:solidFill>
@@ -34289,7 +34326,7 @@
               </a:rPr>
               <a:t>BTC, ETH, DOGE, LINK, SOL, XRP</a:t>
             </a:r>
-            <a:endParaRPr lang="en-US" sz="1600" b="1" dirty="0">
+            <a:endParaRPr lang="en-US" sz="1600" dirty="0">
               <a:solidFill>
                 <a:schemeClr val="dk1"/>
               </a:solidFill>
@@ -34312,7 +34349,7 @@
               <a:buChar char="•"/>
             </a:pPr>
             <a:r>
-              <a:rPr lang="en-US" sz="2000" b="1" u="none" strike="noStrike" dirty="0">
+              <a:rPr lang="en-US" sz="2000" u="none" strike="noStrike" dirty="0">
                 <a:solidFill>
                   <a:schemeClr val="dk1"/>
                 </a:solidFill>
@@ -34339,7 +34376,7 @@
               <a:buChar char="•"/>
             </a:pPr>
             <a:r>
-              <a:rPr lang="en-US" sz="1600" b="1" dirty="0">
+              <a:rPr lang="en-US" sz="1600" dirty="0">
                 <a:solidFill>
                   <a:schemeClr val="dk1"/>
                 </a:solidFill>
@@ -34364,7 +34401,7 @@
               <a:buChar char="•"/>
             </a:pPr>
             <a:r>
-              <a:rPr lang="en-US" sz="1600" b="1" u="none" strike="noStrike" dirty="0">
+              <a:rPr lang="en-US" sz="1600" u="none" strike="noStrike" dirty="0">
                 <a:solidFill>
                   <a:schemeClr val="dk1"/>
                 </a:solidFill>
@@ -34375,7 +34412,7 @@
               <a:t>P</a:t>
             </a:r>
             <a:r>
-              <a:rPr lang="en-US" sz="1600" b="1" dirty="0">
+              <a:rPr lang="en-US" sz="1600" dirty="0">
                 <a:solidFill>
                   <a:schemeClr val="dk1"/>
                 </a:solidFill>
@@ -34400,7 +34437,7 @@
               <a:buChar char="•"/>
             </a:pPr>
             <a:r>
-              <a:rPr lang="en-US" sz="2000" b="1" u="none" strike="noStrike" dirty="0">
+              <a:rPr lang="en-US" sz="2000" u="none" strike="noStrike" dirty="0">
                 <a:solidFill>
                   <a:schemeClr val="dk1"/>
                 </a:solidFill>
@@ -34424,7 +34461,7 @@
               </a:buClr>
               <a:buSzPct val="75000"/>
             </a:pPr>
-            <a:endParaRPr lang="en-US" sz="2000" b="1" u="none" strike="noStrike" dirty="0">
+            <a:endParaRPr lang="en-US" sz="2000" u="none" strike="noStrike" dirty="0">
               <a:solidFill>
                 <a:schemeClr val="dk1"/>
               </a:solidFill>
@@ -34448,7 +34485,7 @@
               <a:buFont typeface="Arial"/>
               <a:buChar char="•"/>
             </a:pPr>
-            <a:endParaRPr lang="en-US" sz="100" b="1" u="none" strike="noStrike" dirty="0">
+            <a:endParaRPr lang="en-US" sz="100" u="none" strike="noStrike" dirty="0">
               <a:solidFill>
                 <a:schemeClr val="dk1"/>
               </a:solidFill>
@@ -34470,7 +34507,7 @@
               </a:buClr>
               <a:buSzPct val="75000"/>
             </a:pPr>
-            <a:endParaRPr lang="en-US" sz="100" b="1" u="none" strike="noStrike" dirty="0">
+            <a:endParaRPr lang="en-US" sz="100" u="none" strike="noStrike" dirty="0">
               <a:solidFill>
                 <a:srgbClr val="000000"/>
               </a:solidFill>
@@ -34623,7 +34660,7 @@
               <a:buChar char="•"/>
             </a:pPr>
             <a:r>
-              <a:rPr lang="en-US" sz="2000" b="1" u="none" strike="noStrike" dirty="0">
+              <a:rPr lang="en-US" sz="2000" u="none" strike="noStrike" dirty="0">
                 <a:solidFill>
                   <a:schemeClr val="dk1"/>
                 </a:solidFill>
@@ -34650,7 +34687,7 @@
               <a:buChar char="•"/>
             </a:pPr>
             <a:r>
-              <a:rPr lang="en-US" sz="1600" b="1" u="none" strike="noStrike" dirty="0">
+              <a:rPr lang="en-US" sz="1600" u="none" strike="noStrike" dirty="0">
                 <a:solidFill>
                   <a:schemeClr val="dk1"/>
                 </a:solidFill>
@@ -34661,7 +34698,7 @@
               <a:t>Time-</a:t>
             </a:r>
             <a:r>
-              <a:rPr lang="en-US" sz="1600" b="1" u="none" strike="noStrike" dirty="0" err="1">
+              <a:rPr lang="en-US" sz="1600" u="none" strike="noStrike" dirty="0" err="1">
                 <a:solidFill>
                   <a:schemeClr val="dk1"/>
                 </a:solidFill>
@@ -34672,7 +34709,7 @@
               <a:t>synchornzied</a:t>
             </a:r>
             <a:r>
-              <a:rPr lang="en-US" sz="1600" b="1" u="none" strike="noStrike" dirty="0">
+              <a:rPr lang="en-US" sz="1600" u="none" strike="noStrike" dirty="0">
                 <a:solidFill>
                   <a:schemeClr val="dk1"/>
                 </a:solidFill>
@@ -34683,7 +34720,7 @@
               <a:t> across exchanges (convert</a:t>
             </a:r>
             <a:r>
-              <a:rPr lang="en-US" sz="1600" b="1" dirty="0">
+              <a:rPr lang="en-US" sz="1600" dirty="0">
                 <a:solidFill>
                   <a:schemeClr val="dk1"/>
                 </a:solidFill>
@@ -34692,7 +34729,7 @@
               <a:t>ed</a:t>
             </a:r>
             <a:r>
-              <a:rPr lang="en-US" sz="1600" b="1" u="none" strike="noStrike" dirty="0">
+              <a:rPr lang="en-US" sz="1600" u="none" strike="noStrike" dirty="0">
                 <a:solidFill>
                   <a:schemeClr val="dk1"/>
                 </a:solidFill>
@@ -34719,7 +34756,7 @@
               <a:buChar char="•"/>
             </a:pPr>
             <a:r>
-              <a:rPr lang="en-US" sz="1600" b="1" u="none" strike="noStrike" dirty="0">
+              <a:rPr lang="en-US" sz="1600" u="none" strike="noStrike" dirty="0">
                 <a:solidFill>
                   <a:schemeClr val="dk1"/>
                 </a:solidFill>
@@ -34745,7 +34782,7 @@
               <a:buFont typeface="Arial"/>
               <a:buChar char="•"/>
             </a:pPr>
-            <a:endParaRPr lang="en-US" sz="2000" b="1" u="none" strike="noStrike" dirty="0">
+            <a:endParaRPr lang="en-US" sz="2000" u="none" strike="noStrike" dirty="0">
               <a:solidFill>
                 <a:schemeClr val="dk1"/>
               </a:solidFill>
@@ -34769,7 +34806,7 @@
               <a:buFont typeface="Arial"/>
               <a:buChar char="•"/>
             </a:pPr>
-            <a:endParaRPr lang="en-US" sz="2000" b="1" dirty="0">
+            <a:endParaRPr lang="en-US" sz="2000" dirty="0">
               <a:solidFill>
                 <a:schemeClr val="dk1"/>
               </a:solidFill>
@@ -34789,7 +34826,7 @@
                 <a:tab pos="0" algn="l"/>
               </a:tabLst>
             </a:pPr>
-            <a:endParaRPr lang="en-US" sz="2000" b="1" u="none" strike="noStrike" dirty="0">
+            <a:endParaRPr lang="en-US" sz="2000" u="none" strike="noStrike" dirty="0">
               <a:solidFill>
                 <a:srgbClr val="000000"/>
               </a:solidFill>
@@ -34987,7 +35024,7 @@
               <a:buChar char="•"/>
             </a:pPr>
             <a:r>
-              <a:rPr lang="en-US" sz="1600" b="1" dirty="0">
+              <a:rPr lang="en-US" sz="1600" dirty="0">
                 <a:solidFill>
                   <a:schemeClr val="dk1"/>
                 </a:solidFill>
@@ -35012,7 +35049,7 @@
               <a:buChar char="•"/>
             </a:pPr>
             <a:r>
-              <a:rPr lang="en-US" sz="1400" b="1" dirty="0">
+              <a:rPr lang="en-US" sz="1400" dirty="0">
                 <a:solidFill>
                   <a:schemeClr val="dk1"/>
                 </a:solidFill>
@@ -35037,7 +35074,7 @@
               <a:buChar char="•"/>
             </a:pPr>
             <a:r>
-              <a:rPr lang="en-US" sz="1400" b="1" u="none" strike="noStrike" dirty="0">
+              <a:rPr lang="en-US" sz="1400" u="none" strike="noStrike" dirty="0">
                 <a:solidFill>
                   <a:schemeClr val="dk1"/>
                 </a:solidFill>
@@ -35048,7 +35085,7 @@
               <a:t>Some exchanges missing certain cryptocurren</a:t>
             </a:r>
             <a:r>
-              <a:rPr lang="en-US" sz="1400" b="1" dirty="0">
+              <a:rPr lang="en-US" sz="1400" dirty="0">
                 <a:solidFill>
                   <a:schemeClr val="dk1"/>
                 </a:solidFill>
@@ -35073,7 +35110,7 @@
               <a:buChar char="•"/>
             </a:pPr>
             <a:r>
-              <a:rPr lang="en-US" sz="1400" b="1" u="none" strike="noStrike" dirty="0">
+              <a:rPr lang="en-US" sz="1400" u="none" strike="noStrike" dirty="0">
                 <a:solidFill>
                   <a:schemeClr val="dk1"/>
                 </a:solidFill>
@@ -35100,7 +35137,7 @@
               <a:buChar char="•"/>
             </a:pPr>
             <a:r>
-              <a:rPr lang="en-US" sz="1600" b="1" dirty="0">
+              <a:rPr lang="en-US" sz="1600" dirty="0">
                 <a:solidFill>
                   <a:schemeClr val="dk1"/>
                 </a:solidFill>
@@ -35125,7 +35162,7 @@
               <a:buChar char="•"/>
             </a:pPr>
             <a:r>
-              <a:rPr lang="en-US" sz="1400" b="1" u="none" strike="noStrike" dirty="0">
+              <a:rPr lang="en-US" sz="1400" u="none" strike="noStrike" dirty="0">
                 <a:solidFill>
                   <a:schemeClr val="dk1"/>
                 </a:solidFill>
@@ -35136,7 +35173,7 @@
               <a:t>Ex</a:t>
             </a:r>
             <a:r>
-              <a:rPr lang="en-US" sz="1400" b="1" dirty="0">
+              <a:rPr lang="en-US" sz="1400" dirty="0">
                 <a:solidFill>
                   <a:schemeClr val="dk1"/>
                 </a:solidFill>
@@ -35145,7 +35182,7 @@
               <a:t>change-</a:t>
             </a:r>
             <a:r>
-              <a:rPr lang="en-US" sz="1400" b="1" dirty="0" err="1">
+              <a:rPr lang="en-US" sz="1400" dirty="0" err="1">
                 <a:solidFill>
                   <a:schemeClr val="dk1"/>
                 </a:solidFill>
@@ -35154,7 +35191,7 @@
               <a:t>specifc</a:t>
             </a:r>
             <a:r>
-              <a:rPr lang="en-US" sz="1400" b="1" dirty="0">
+              <a:rPr lang="en-US" sz="1400" dirty="0">
                 <a:solidFill>
                   <a:schemeClr val="dk1"/>
                 </a:solidFill>
@@ -35179,7 +35216,7 @@
               <a:buChar char="•"/>
             </a:pPr>
             <a:r>
-              <a:rPr lang="en-US" sz="1400" b="1" u="none" strike="noStrike" dirty="0">
+              <a:rPr lang="en-US" sz="1400" u="none" strike="noStrike" dirty="0">
                 <a:solidFill>
                   <a:schemeClr val="dk1"/>
                 </a:solidFill>
@@ -35206,7 +35243,7 @@
               <a:buChar char="•"/>
             </a:pPr>
             <a:r>
-              <a:rPr lang="en-US" sz="1600" b="1" u="none" strike="noStrike" dirty="0">
+              <a:rPr lang="en-US" sz="1600" u="none" strike="noStrike" dirty="0">
                 <a:solidFill>
                   <a:schemeClr val="dk1"/>
                 </a:solidFill>
@@ -35233,7 +35270,7 @@
               <a:buChar char="•"/>
             </a:pPr>
             <a:r>
-              <a:rPr lang="en-US" sz="1400" b="1" dirty="0">
+              <a:rPr lang="en-US" sz="1400" dirty="0">
                 <a:solidFill>
                   <a:schemeClr val="dk1"/>
                 </a:solidFill>
@@ -35242,7 +35279,7 @@
               <a:t>Missing values (</a:t>
             </a:r>
             <a:r>
-              <a:rPr lang="en-US" sz="1400" b="1" dirty="0" err="1">
+              <a:rPr lang="en-US" sz="1400" dirty="0" err="1">
                 <a:solidFill>
                   <a:schemeClr val="dk1"/>
                 </a:solidFill>
@@ -35251,7 +35288,7 @@
               <a:t>NaN</a:t>
             </a:r>
             <a:r>
-              <a:rPr lang="en-US" sz="1400" b="1" dirty="0">
+              <a:rPr lang="en-US" sz="1400" dirty="0">
                 <a:solidFill>
                   <a:schemeClr val="dk1"/>
                 </a:solidFill>
@@ -35276,7 +35313,7 @@
               <a:buChar char="•"/>
             </a:pPr>
             <a:r>
-              <a:rPr lang="en-US" sz="1400" b="1" dirty="0">
+              <a:rPr lang="en-US" sz="1400" dirty="0">
                 <a:solidFill>
                   <a:schemeClr val="dk1"/>
                 </a:solidFill>
@@ -35284,7 +35321,7 @@
               </a:rPr>
               <a:t>Volume discrepancies across exchanges</a:t>
             </a:r>
-            <a:endParaRPr lang="en-US" sz="1400" b="1" u="none" strike="noStrike" dirty="0">
+            <a:endParaRPr lang="en-US" sz="1400" u="none" strike="noStrike" dirty="0">
               <a:solidFill>
                 <a:schemeClr val="dk1"/>
               </a:solidFill>
@@ -35308,7 +35345,7 @@
               <a:buFont typeface="Arial"/>
               <a:buChar char="•"/>
             </a:pPr>
-            <a:endParaRPr lang="en-US" sz="1600" b="1" dirty="0">
+            <a:endParaRPr lang="en-US" sz="1600" dirty="0">
               <a:solidFill>
                 <a:schemeClr val="dk1"/>
               </a:solidFill>
@@ -35328,7 +35365,7 @@
                 <a:tab pos="0" algn="l"/>
               </a:tabLst>
             </a:pPr>
-            <a:endParaRPr lang="en-US" sz="1600" b="1" u="none" strike="noStrike" dirty="0">
+            <a:endParaRPr lang="en-US" sz="1600" u="none" strike="noStrike" dirty="0">
               <a:solidFill>
                 <a:srgbClr val="000000"/>
               </a:solidFill>

--- a/Presentations/Cryto Arbitrage P2.pptx
+++ b/Presentations/Cryto Arbitrage P2.pptx
@@ -22,10 +22,11 @@
     <p:sldId id="288" r:id="rId16"/>
     <p:sldId id="282" r:id="rId17"/>
     <p:sldId id="283" r:id="rId18"/>
-    <p:sldId id="262" r:id="rId19"/>
-    <p:sldId id="263" r:id="rId20"/>
-    <p:sldId id="284" r:id="rId21"/>
-    <p:sldId id="275" r:id="rId22"/>
+    <p:sldId id="289" r:id="rId19"/>
+    <p:sldId id="262" r:id="rId20"/>
+    <p:sldId id="263" r:id="rId21"/>
+    <p:sldId id="284" r:id="rId22"/>
+    <p:sldId id="275" r:id="rId23"/>
   </p:sldIdLst>
   <p:sldSz cx="12192000" cy="6858000"/>
   <p:notesSz cx="7559675" cy="10691813"/>
@@ -162,6 +163,7 @@
         </p14:section>
         <p14:section name="Workplan and Recap" id="{550CE14A-E448-E04D-A1E4-79D8FC13BB80}">
           <p14:sldIdLst>
+            <p14:sldId id="289"/>
             <p14:sldId id="262"/>
             <p14:sldId id="263"/>
             <p14:sldId id="284"/>
@@ -32230,6 +32232,105 @@
   <p:cSld>
     <p:spTree>
       <p:nvGrpSpPr>
+        <p:cNvPr id="1" name="">
+          <a:extLst>
+            <a:ext uri="{FF2B5EF4-FFF2-40B4-BE49-F238E27FC236}">
+              <a16:creationId xmlns:a16="http://schemas.microsoft.com/office/drawing/2014/main" id="{8F34F0D5-12FC-B216-0F87-571C21EA5097}"/>
+            </a:ext>
+          </a:extLst>
+        </p:cNvPr>
+        <p:cNvGrpSpPr/>
+        <p:nvPr/>
+      </p:nvGrpSpPr>
+      <p:grpSpPr>
+        <a:xfrm>
+          <a:off x="0" y="0"/>
+          <a:ext cx="0" cy="0"/>
+          <a:chOff x="0" y="0"/>
+          <a:chExt cx="0" cy="0"/>
+        </a:xfrm>
+      </p:grpSpPr>
+      <p:sp>
+        <p:nvSpPr>
+          <p:cNvPr id="70" name="PlaceHolder 1">
+            <a:extLst>
+              <a:ext uri="{FF2B5EF4-FFF2-40B4-BE49-F238E27FC236}">
+                <a16:creationId xmlns:a16="http://schemas.microsoft.com/office/drawing/2014/main" id="{9FB59E93-30AB-775F-D450-0371D04D54A2}"/>
+              </a:ext>
+            </a:extLst>
+          </p:cNvPr>
+          <p:cNvSpPr>
+            <a:spLocks noGrp="1"/>
+          </p:cNvSpPr>
+          <p:nvPr>
+            <p:ph type="title"/>
+          </p:nvPr>
+        </p:nvSpPr>
+        <p:spPr>
+          <a:prstGeom prst="rect">
+            <a:avLst/>
+          </a:prstGeom>
+          <a:noFill/>
+          <a:ln w="0">
+            <a:noFill/>
+          </a:ln>
+        </p:spPr>
+        <p:txBody>
+          <a:bodyPr lIns="91440" tIns="45720" rIns="91440" bIns="45720" anchor="b">
+            <a:noAutofit/>
+          </a:bodyPr>
+          <a:lstStyle/>
+          <a:p>
+            <a:pPr indent="0" defTabSz="914400">
+              <a:lnSpc>
+                <a:spcPct val="120000"/>
+              </a:lnSpc>
+              <a:buNone/>
+              <a:tabLst>
+                <a:tab pos="0" algn="l"/>
+              </a:tabLst>
+            </a:pPr>
+            <a:r>
+              <a:rPr lang="en-IL" sz="3600" cap="all" spc="300" dirty="0">
+                <a:solidFill>
+                  <a:srgbClr val="FFFFFF"/>
+                </a:solidFill>
+                <a:highlight>
+                  <a:srgbClr val="000000"/>
+                </a:highlight>
+                <a:latin typeface="Grandview"/>
+              </a:rPr>
+              <a:t>WHAT’s next?</a:t>
+            </a:r>
+            <a:endParaRPr lang="en-US" sz="3600" b="0" u="none" strike="noStrike" dirty="0">
+              <a:solidFill>
+                <a:srgbClr val="000000"/>
+              </a:solidFill>
+              <a:effectLst/>
+              <a:uFillTx/>
+              <a:latin typeface="Arial"/>
+            </a:endParaRPr>
+          </a:p>
+        </p:txBody>
+      </p:sp>
+    </p:spTree>
+    <p:extLst>
+      <p:ext uri="{BB962C8B-B14F-4D97-AF65-F5344CB8AC3E}">
+        <p14:creationId xmlns:p14="http://schemas.microsoft.com/office/powerpoint/2010/main" val="4114083179"/>
+      </p:ext>
+    </p:extLst>
+  </p:cSld>
+  <p:clrMapOvr>
+    <a:masterClrMapping/>
+  </p:clrMapOvr>
+</p:sld>
+</file>
+
+<file path=ppt/slides/slide19.xml><?xml version="1.0" encoding="utf-8"?>
+<p:sld xmlns:a="http://schemas.openxmlformats.org/drawingml/2006/main" xmlns:r="http://schemas.openxmlformats.org/officeDocument/2006/relationships" xmlns:p="http://schemas.openxmlformats.org/presentationml/2006/main">
+  <p:cSld>
+    <p:spTree>
+      <p:nvGrpSpPr>
         <p:cNvPr id="1" name=""/>
         <p:cNvGrpSpPr/>
         <p:nvPr/>
@@ -32592,287 +32693,6 @@
               </a:tabLst>
             </a:pPr>
             <a:endParaRPr lang="en-US" sz="2000" b="0" u="none" strike="noStrike" dirty="0">
-              <a:solidFill>
-                <a:srgbClr val="000000"/>
-              </a:solidFill>
-              <a:effectLst/>
-              <a:uFillTx/>
-              <a:latin typeface="Arial"/>
-            </a:endParaRPr>
-          </a:p>
-        </p:txBody>
-      </p:sp>
-    </p:spTree>
-  </p:cSld>
-  <p:clrMapOvr>
-    <a:masterClrMapping/>
-  </p:clrMapOvr>
-</p:sld>
-</file>
-
-<file path=ppt/slides/slide19.xml><?xml version="1.0" encoding="utf-8"?>
-<p:sld xmlns:a="http://schemas.openxmlformats.org/drawingml/2006/main" xmlns:r="http://schemas.openxmlformats.org/officeDocument/2006/relationships" xmlns:p="http://schemas.openxmlformats.org/presentationml/2006/main">
-  <p:cSld>
-    <p:spTree>
-      <p:nvGrpSpPr>
-        <p:cNvPr id="1" name=""/>
-        <p:cNvGrpSpPr/>
-        <p:nvPr/>
-      </p:nvGrpSpPr>
-      <p:grpSpPr>
-        <a:xfrm>
-          <a:off x="0" y="0"/>
-          <a:ext cx="0" cy="0"/>
-          <a:chOff x="0" y="0"/>
-          <a:chExt cx="0" cy="0"/>
-        </a:xfrm>
-      </p:grpSpPr>
-      <p:sp>
-        <p:nvSpPr>
-          <p:cNvPr id="77" name="PlaceHolder 1"/>
-          <p:cNvSpPr>
-            <a:spLocks noGrp="1"/>
-          </p:cNvSpPr>
-          <p:nvPr>
-            <p:ph type="title"/>
-          </p:nvPr>
-        </p:nvSpPr>
-        <p:spPr>
-          <a:xfrm>
-            <a:off x="651960" y="647640"/>
-            <a:ext cx="10624320" cy="1145880"/>
-          </a:xfrm>
-          <a:prstGeom prst="rect">
-            <a:avLst/>
-          </a:prstGeom>
-          <a:noFill/>
-          <a:ln w="0">
-            <a:noFill/>
-          </a:ln>
-        </p:spPr>
-        <p:txBody>
-          <a:bodyPr lIns="91440" tIns="45720" rIns="91440" bIns="45720" anchor="b">
-            <a:noAutofit/>
-          </a:bodyPr>
-          <a:lstStyle/>
-          <a:p>
-            <a:pPr indent="0" defTabSz="914400">
-              <a:lnSpc>
-                <a:spcPct val="120000"/>
-              </a:lnSpc>
-              <a:buNone/>
-              <a:tabLst>
-                <a:tab pos="0" algn="l"/>
-              </a:tabLst>
-            </a:pPr>
-            <a:r>
-              <a:rPr lang="en-IL" sz="3600" b="0" u="none" strike="noStrike" cap="all" spc="300">
-                <a:solidFill>
-                  <a:srgbClr val="FFFFFF"/>
-                </a:solidFill>
-                <a:effectLst/>
-                <a:highlight>
-                  <a:srgbClr val="000000"/>
-                </a:highlight>
-                <a:uFillTx/>
-                <a:latin typeface="Grandview"/>
-              </a:rPr>
-              <a:t>Milestones</a:t>
-            </a:r>
-            <a:endParaRPr lang="en-US" sz="3600" b="0" u="none" strike="noStrike">
-              <a:solidFill>
-                <a:srgbClr val="000000"/>
-              </a:solidFill>
-              <a:effectLst/>
-              <a:uFillTx/>
-              <a:latin typeface="Arial"/>
-            </a:endParaRPr>
-          </a:p>
-        </p:txBody>
-      </p:sp>
-      <p:sp>
-        <p:nvSpPr>
-          <p:cNvPr id="78" name="PlaceHolder 2"/>
-          <p:cNvSpPr>
-            <a:spLocks noGrp="1"/>
-          </p:cNvSpPr>
-          <p:nvPr>
-            <p:ph/>
-          </p:nvPr>
-        </p:nvSpPr>
-        <p:spPr>
-          <a:xfrm>
-            <a:off x="651960" y="2095560"/>
-            <a:ext cx="10619640" cy="3846960"/>
-          </a:xfrm>
-          <a:prstGeom prst="rect">
-            <a:avLst/>
-          </a:prstGeom>
-          <a:noFill/>
-          <a:ln w="0">
-            <a:noFill/>
-          </a:ln>
-        </p:spPr>
-        <p:txBody>
-          <a:bodyPr lIns="91440" tIns="45720" rIns="91440" bIns="45720" anchor="t">
-            <a:noAutofit/>
-          </a:bodyPr>
-          <a:lstStyle/>
-          <a:p>
-            <a:pPr marL="228600" indent="-228600" defTabSz="914400">
-              <a:lnSpc>
-                <a:spcPct val="120000"/>
-              </a:lnSpc>
-              <a:spcBef>
-                <a:spcPts val="1001"/>
-              </a:spcBef>
-              <a:buClr>
-                <a:srgbClr val="000000"/>
-              </a:buClr>
-              <a:buSzPct val="75000"/>
-              <a:buFont typeface="Arial"/>
-              <a:buChar char="•"/>
-            </a:pPr>
-            <a:r>
-              <a:rPr lang="en-IL" sz="2000" b="0" u="none" strike="noStrike">
-                <a:solidFill>
-                  <a:schemeClr val="dk1"/>
-                </a:solidFill>
-                <a:effectLst/>
-                <a:uFillTx/>
-                <a:latin typeface="Grandview Display"/>
-              </a:rPr>
-              <a:t>Retrieve relevant datasets using APIs + merge datasets (P1)</a:t>
-            </a:r>
-            <a:endParaRPr lang="en-US" sz="2000" b="0" u="none" strike="noStrike">
-              <a:solidFill>
-                <a:srgbClr val="000000"/>
-              </a:solidFill>
-              <a:effectLst/>
-              <a:uFillTx/>
-              <a:latin typeface="Arial"/>
-            </a:endParaRPr>
-          </a:p>
-          <a:p>
-            <a:pPr marL="228600" indent="-228600" defTabSz="914400">
-              <a:lnSpc>
-                <a:spcPct val="120000"/>
-              </a:lnSpc>
-              <a:spcBef>
-                <a:spcPts val="1001"/>
-              </a:spcBef>
-              <a:buClr>
-                <a:srgbClr val="000000"/>
-              </a:buClr>
-              <a:buSzPct val="75000"/>
-              <a:buFont typeface="Arial"/>
-              <a:buChar char="•"/>
-            </a:pPr>
-            <a:r>
-              <a:rPr lang="en-IL" sz="2000" b="0" u="none" strike="noStrike">
-                <a:solidFill>
-                  <a:schemeClr val="dk1"/>
-                </a:solidFill>
-                <a:effectLst/>
-                <a:uFillTx/>
-                <a:latin typeface="Grandview Display"/>
-              </a:rPr>
-              <a:t>Data engineering: decide on features, identify setbacks and consider possible solutions (P2)</a:t>
-            </a:r>
-            <a:endParaRPr lang="en-US" sz="2000" b="0" u="none" strike="noStrike">
-              <a:solidFill>
-                <a:srgbClr val="000000"/>
-              </a:solidFill>
-              <a:effectLst/>
-              <a:uFillTx/>
-              <a:latin typeface="Arial"/>
-            </a:endParaRPr>
-          </a:p>
-          <a:p>
-            <a:pPr marL="228600" indent="-228600" defTabSz="914400">
-              <a:lnSpc>
-                <a:spcPct val="120000"/>
-              </a:lnSpc>
-              <a:spcBef>
-                <a:spcPts val="1001"/>
-              </a:spcBef>
-              <a:buClr>
-                <a:srgbClr val="000000"/>
-              </a:buClr>
-              <a:buSzPct val="75000"/>
-              <a:buFont typeface="Arial"/>
-              <a:buChar char="•"/>
-            </a:pPr>
-            <a:r>
-              <a:rPr lang="en-IL" sz="2000" b="0" u="none" strike="noStrike">
-                <a:solidFill>
-                  <a:schemeClr val="dk1"/>
-                </a:solidFill>
-                <a:effectLst/>
-                <a:uFillTx/>
-                <a:latin typeface="Grandview Display"/>
-              </a:rPr>
-              <a:t>Workable model on existing data (P3)</a:t>
-            </a:r>
-            <a:endParaRPr lang="en-US" sz="2000" b="0" u="none" strike="noStrike">
-              <a:solidFill>
-                <a:srgbClr val="000000"/>
-              </a:solidFill>
-              <a:effectLst/>
-              <a:uFillTx/>
-              <a:latin typeface="Arial"/>
-            </a:endParaRPr>
-          </a:p>
-          <a:p>
-            <a:pPr marL="228600" indent="-228600" defTabSz="914400">
-              <a:lnSpc>
-                <a:spcPct val="120000"/>
-              </a:lnSpc>
-              <a:spcBef>
-                <a:spcPts val="1001"/>
-              </a:spcBef>
-              <a:buClr>
-                <a:srgbClr val="000000"/>
-              </a:buClr>
-              <a:buSzPct val="75000"/>
-              <a:buFont typeface="Arial"/>
-              <a:buChar char="•"/>
-            </a:pPr>
-            <a:r>
-              <a:rPr lang="en-IL" sz="2000" b="0" u="none" strike="noStrike">
-                <a:solidFill>
-                  <a:schemeClr val="dk1"/>
-                </a:solidFill>
-                <a:effectLst/>
-                <a:uFillTx/>
-                <a:latin typeface="Grandview Display"/>
-                <a:ea typeface="Microsoft YaHei"/>
-              </a:rPr>
-              <a:t>Deploy model on real-time data + derive conclusions on model’s accuracy and viability (final)</a:t>
-            </a:r>
-            <a:endParaRPr lang="en-US" sz="2000" b="0" u="none" strike="noStrike">
-              <a:solidFill>
-                <a:srgbClr val="000000"/>
-              </a:solidFill>
-              <a:effectLst/>
-              <a:uFillTx/>
-              <a:latin typeface="Arial"/>
-            </a:endParaRPr>
-          </a:p>
-          <a:p>
-            <a:pPr indent="0" defTabSz="914400">
-              <a:lnSpc>
-                <a:spcPct val="120000"/>
-              </a:lnSpc>
-              <a:spcBef>
-                <a:spcPts val="1001"/>
-              </a:spcBef>
-              <a:buNone/>
-              <a:tabLst>
-                <a:tab pos="0" algn="l"/>
-              </a:tabLst>
-            </a:pPr>
-            <a:endParaRPr lang="en-US" sz="2000" b="0" u="none" strike="noStrike">
               <a:solidFill>
                 <a:srgbClr val="000000"/>
               </a:solidFill>
@@ -33150,6 +32970,287 @@
 </file>
 
 <file path=ppt/slides/slide20.xml><?xml version="1.0" encoding="utf-8"?>
+<p:sld xmlns:a="http://schemas.openxmlformats.org/drawingml/2006/main" xmlns:r="http://schemas.openxmlformats.org/officeDocument/2006/relationships" xmlns:p="http://schemas.openxmlformats.org/presentationml/2006/main">
+  <p:cSld>
+    <p:spTree>
+      <p:nvGrpSpPr>
+        <p:cNvPr id="1" name=""/>
+        <p:cNvGrpSpPr/>
+        <p:nvPr/>
+      </p:nvGrpSpPr>
+      <p:grpSpPr>
+        <a:xfrm>
+          <a:off x="0" y="0"/>
+          <a:ext cx="0" cy="0"/>
+          <a:chOff x="0" y="0"/>
+          <a:chExt cx="0" cy="0"/>
+        </a:xfrm>
+      </p:grpSpPr>
+      <p:sp>
+        <p:nvSpPr>
+          <p:cNvPr id="77" name="PlaceHolder 1"/>
+          <p:cNvSpPr>
+            <a:spLocks noGrp="1"/>
+          </p:cNvSpPr>
+          <p:nvPr>
+            <p:ph type="title"/>
+          </p:nvPr>
+        </p:nvSpPr>
+        <p:spPr>
+          <a:xfrm>
+            <a:off x="651960" y="647640"/>
+            <a:ext cx="10624320" cy="1145880"/>
+          </a:xfrm>
+          <a:prstGeom prst="rect">
+            <a:avLst/>
+          </a:prstGeom>
+          <a:noFill/>
+          <a:ln w="0">
+            <a:noFill/>
+          </a:ln>
+        </p:spPr>
+        <p:txBody>
+          <a:bodyPr lIns="91440" tIns="45720" rIns="91440" bIns="45720" anchor="b">
+            <a:noAutofit/>
+          </a:bodyPr>
+          <a:lstStyle/>
+          <a:p>
+            <a:pPr indent="0" defTabSz="914400">
+              <a:lnSpc>
+                <a:spcPct val="120000"/>
+              </a:lnSpc>
+              <a:buNone/>
+              <a:tabLst>
+                <a:tab pos="0" algn="l"/>
+              </a:tabLst>
+            </a:pPr>
+            <a:r>
+              <a:rPr lang="en-IL" sz="3600" b="0" u="none" strike="noStrike" cap="all" spc="300">
+                <a:solidFill>
+                  <a:srgbClr val="FFFFFF"/>
+                </a:solidFill>
+                <a:effectLst/>
+                <a:highlight>
+                  <a:srgbClr val="000000"/>
+                </a:highlight>
+                <a:uFillTx/>
+                <a:latin typeface="Grandview"/>
+              </a:rPr>
+              <a:t>Milestones</a:t>
+            </a:r>
+            <a:endParaRPr lang="en-US" sz="3600" b="0" u="none" strike="noStrike">
+              <a:solidFill>
+                <a:srgbClr val="000000"/>
+              </a:solidFill>
+              <a:effectLst/>
+              <a:uFillTx/>
+              <a:latin typeface="Arial"/>
+            </a:endParaRPr>
+          </a:p>
+        </p:txBody>
+      </p:sp>
+      <p:sp>
+        <p:nvSpPr>
+          <p:cNvPr id="78" name="PlaceHolder 2"/>
+          <p:cNvSpPr>
+            <a:spLocks noGrp="1"/>
+          </p:cNvSpPr>
+          <p:nvPr>
+            <p:ph/>
+          </p:nvPr>
+        </p:nvSpPr>
+        <p:spPr>
+          <a:xfrm>
+            <a:off x="651960" y="2095560"/>
+            <a:ext cx="10619640" cy="3846960"/>
+          </a:xfrm>
+          <a:prstGeom prst="rect">
+            <a:avLst/>
+          </a:prstGeom>
+          <a:noFill/>
+          <a:ln w="0">
+            <a:noFill/>
+          </a:ln>
+        </p:spPr>
+        <p:txBody>
+          <a:bodyPr lIns="91440" tIns="45720" rIns="91440" bIns="45720" anchor="t">
+            <a:noAutofit/>
+          </a:bodyPr>
+          <a:lstStyle/>
+          <a:p>
+            <a:pPr marL="228600" indent="-228600" defTabSz="914400">
+              <a:lnSpc>
+                <a:spcPct val="120000"/>
+              </a:lnSpc>
+              <a:spcBef>
+                <a:spcPts val="1001"/>
+              </a:spcBef>
+              <a:buClr>
+                <a:srgbClr val="000000"/>
+              </a:buClr>
+              <a:buSzPct val="75000"/>
+              <a:buFont typeface="Arial"/>
+              <a:buChar char="•"/>
+            </a:pPr>
+            <a:r>
+              <a:rPr lang="en-IL" sz="2000" b="0" u="none" strike="noStrike">
+                <a:solidFill>
+                  <a:schemeClr val="dk1"/>
+                </a:solidFill>
+                <a:effectLst/>
+                <a:uFillTx/>
+                <a:latin typeface="Grandview Display"/>
+              </a:rPr>
+              <a:t>Retrieve relevant datasets using APIs + merge datasets (P1)</a:t>
+            </a:r>
+            <a:endParaRPr lang="en-US" sz="2000" b="0" u="none" strike="noStrike">
+              <a:solidFill>
+                <a:srgbClr val="000000"/>
+              </a:solidFill>
+              <a:effectLst/>
+              <a:uFillTx/>
+              <a:latin typeface="Arial"/>
+            </a:endParaRPr>
+          </a:p>
+          <a:p>
+            <a:pPr marL="228600" indent="-228600" defTabSz="914400">
+              <a:lnSpc>
+                <a:spcPct val="120000"/>
+              </a:lnSpc>
+              <a:spcBef>
+                <a:spcPts val="1001"/>
+              </a:spcBef>
+              <a:buClr>
+                <a:srgbClr val="000000"/>
+              </a:buClr>
+              <a:buSzPct val="75000"/>
+              <a:buFont typeface="Arial"/>
+              <a:buChar char="•"/>
+            </a:pPr>
+            <a:r>
+              <a:rPr lang="en-IL" sz="2000" b="0" u="none" strike="noStrike">
+                <a:solidFill>
+                  <a:schemeClr val="dk1"/>
+                </a:solidFill>
+                <a:effectLst/>
+                <a:uFillTx/>
+                <a:latin typeface="Grandview Display"/>
+              </a:rPr>
+              <a:t>Data engineering: decide on features, identify setbacks and consider possible solutions (P2)</a:t>
+            </a:r>
+            <a:endParaRPr lang="en-US" sz="2000" b="0" u="none" strike="noStrike">
+              <a:solidFill>
+                <a:srgbClr val="000000"/>
+              </a:solidFill>
+              <a:effectLst/>
+              <a:uFillTx/>
+              <a:latin typeface="Arial"/>
+            </a:endParaRPr>
+          </a:p>
+          <a:p>
+            <a:pPr marL="228600" indent="-228600" defTabSz="914400">
+              <a:lnSpc>
+                <a:spcPct val="120000"/>
+              </a:lnSpc>
+              <a:spcBef>
+                <a:spcPts val="1001"/>
+              </a:spcBef>
+              <a:buClr>
+                <a:srgbClr val="000000"/>
+              </a:buClr>
+              <a:buSzPct val="75000"/>
+              <a:buFont typeface="Arial"/>
+              <a:buChar char="•"/>
+            </a:pPr>
+            <a:r>
+              <a:rPr lang="en-IL" sz="2000" b="0" u="none" strike="noStrike">
+                <a:solidFill>
+                  <a:schemeClr val="dk1"/>
+                </a:solidFill>
+                <a:effectLst/>
+                <a:uFillTx/>
+                <a:latin typeface="Grandview Display"/>
+              </a:rPr>
+              <a:t>Workable model on existing data (P3)</a:t>
+            </a:r>
+            <a:endParaRPr lang="en-US" sz="2000" b="0" u="none" strike="noStrike">
+              <a:solidFill>
+                <a:srgbClr val="000000"/>
+              </a:solidFill>
+              <a:effectLst/>
+              <a:uFillTx/>
+              <a:latin typeface="Arial"/>
+            </a:endParaRPr>
+          </a:p>
+          <a:p>
+            <a:pPr marL="228600" indent="-228600" defTabSz="914400">
+              <a:lnSpc>
+                <a:spcPct val="120000"/>
+              </a:lnSpc>
+              <a:spcBef>
+                <a:spcPts val="1001"/>
+              </a:spcBef>
+              <a:buClr>
+                <a:srgbClr val="000000"/>
+              </a:buClr>
+              <a:buSzPct val="75000"/>
+              <a:buFont typeface="Arial"/>
+              <a:buChar char="•"/>
+            </a:pPr>
+            <a:r>
+              <a:rPr lang="en-IL" sz="2000" b="0" u="none" strike="noStrike">
+                <a:solidFill>
+                  <a:schemeClr val="dk1"/>
+                </a:solidFill>
+                <a:effectLst/>
+                <a:uFillTx/>
+                <a:latin typeface="Grandview Display"/>
+                <a:ea typeface="Microsoft YaHei"/>
+              </a:rPr>
+              <a:t>Deploy model on real-time data + derive conclusions on model’s accuracy and viability (final)</a:t>
+            </a:r>
+            <a:endParaRPr lang="en-US" sz="2000" b="0" u="none" strike="noStrike">
+              <a:solidFill>
+                <a:srgbClr val="000000"/>
+              </a:solidFill>
+              <a:effectLst/>
+              <a:uFillTx/>
+              <a:latin typeface="Arial"/>
+            </a:endParaRPr>
+          </a:p>
+          <a:p>
+            <a:pPr indent="0" defTabSz="914400">
+              <a:lnSpc>
+                <a:spcPct val="120000"/>
+              </a:lnSpc>
+              <a:spcBef>
+                <a:spcPts val="1001"/>
+              </a:spcBef>
+              <a:buNone/>
+              <a:tabLst>
+                <a:tab pos="0" algn="l"/>
+              </a:tabLst>
+            </a:pPr>
+            <a:endParaRPr lang="en-US" sz="2000" b="0" u="none" strike="noStrike">
+              <a:solidFill>
+                <a:srgbClr val="000000"/>
+              </a:solidFill>
+              <a:effectLst/>
+              <a:uFillTx/>
+              <a:latin typeface="Arial"/>
+            </a:endParaRPr>
+          </a:p>
+        </p:txBody>
+      </p:sp>
+    </p:spTree>
+  </p:cSld>
+  <p:clrMapOvr>
+    <a:masterClrMapping/>
+  </p:clrMapOvr>
+</p:sld>
+</file>
+
+<file path=ppt/slides/slide21.xml><?xml version="1.0" encoding="utf-8"?>
 <p:sld xmlns:a="http://schemas.openxmlformats.org/drawingml/2006/main" xmlns:r="http://schemas.openxmlformats.org/officeDocument/2006/relationships" xmlns:p="http://schemas.openxmlformats.org/presentationml/2006/main" show="0">
   <p:cSld>
     <p:spTree>
@@ -33613,7 +33714,7 @@
 </p:sld>
 </file>
 
-<file path=ppt/slides/slide21.xml><?xml version="1.0" encoding="utf-8"?>
+<file path=ppt/slides/slide22.xml><?xml version="1.0" encoding="utf-8"?>
 <p:sld xmlns:a="http://schemas.openxmlformats.org/drawingml/2006/main" xmlns:r="http://schemas.openxmlformats.org/officeDocument/2006/relationships" xmlns:p="http://schemas.openxmlformats.org/presentationml/2006/main">
   <p:cSld>
     <p:spTree>
